--- a/public/lessons/year-6-maths/autumn/week-5/classify-prime-square-and-cube-numbers/teaching-powerpoint-v1.pptx
+++ b/public/lessons/year-6-maths/autumn/week-5/classify-prime-square-and-cube-numbers/teaching-powerpoint-v1.pptx
@@ -2,24 +2,24 @@
 <file path=ppt/presentation.xml><?xml version="1.0" encoding="utf-8"?>
 <p:presentation xmlns:p="http://schemas.openxmlformats.org/presentationml/2006/main">
   <p:sldMasterIdLst>
-    <p:sldMasterId xmlns:r="http://schemas.openxmlformats.org/officeDocument/2006/relationships" id="2147483648" r:id="R06fdbd749680447d"/>
+    <p:sldMasterId xmlns:r="http://schemas.openxmlformats.org/officeDocument/2006/relationships" id="2147483648" r:id="R49c5ebc7b2df446c"/>
   </p:sldMasterIdLst>
   <p:notesMasterIdLst>
-    <p:notesMasterId xmlns:r="http://schemas.openxmlformats.org/officeDocument/2006/relationships" r:id="R32d8f078a6dc4e7a"/>
+    <p:notesMasterId xmlns:r="http://schemas.openxmlformats.org/officeDocument/2006/relationships" r:id="Rce15c3c618af4be8"/>
   </p:notesMasterIdLst>
   <p:sldIdLst>
-    <p:sldId xmlns:r="http://schemas.openxmlformats.org/officeDocument/2006/relationships" id="256" r:id="Rda5e8c1005a64c93"/>
-    <p:sldId xmlns:r="http://schemas.openxmlformats.org/officeDocument/2006/relationships" id="257" r:id="R2fe13d5fedb54492"/>
-    <p:sldId xmlns:r="http://schemas.openxmlformats.org/officeDocument/2006/relationships" id="258" r:id="R05fc92b7bcbc47b9"/>
-    <p:sldId xmlns:r="http://schemas.openxmlformats.org/officeDocument/2006/relationships" id="259" r:id="R80ad164ec0504096"/>
-    <p:sldId xmlns:r="http://schemas.openxmlformats.org/officeDocument/2006/relationships" id="260" r:id="R1cd8dba3f28346b8"/>
-    <p:sldId xmlns:r="http://schemas.openxmlformats.org/officeDocument/2006/relationships" id="261" r:id="R0b3a4cc91c3c41ce"/>
-    <p:sldId xmlns:r="http://schemas.openxmlformats.org/officeDocument/2006/relationships" id="262" r:id="R8f3b4b7634d84798"/>
-    <p:sldId xmlns:r="http://schemas.openxmlformats.org/officeDocument/2006/relationships" id="263" r:id="R084781388b7f4131"/>
-    <p:sldId xmlns:r="http://schemas.openxmlformats.org/officeDocument/2006/relationships" id="264" r:id="R0514099f5b594138"/>
-    <p:sldId xmlns:r="http://schemas.openxmlformats.org/officeDocument/2006/relationships" id="265" r:id="Rec64adf2ac0a4dc6"/>
-    <p:sldId xmlns:r="http://schemas.openxmlformats.org/officeDocument/2006/relationships" id="266" r:id="R71d114b8c14841f2"/>
-    <p:sldId xmlns:r="http://schemas.openxmlformats.org/officeDocument/2006/relationships" id="267" r:id="R3531ae4722024fe4"/>
+    <p:sldId xmlns:r="http://schemas.openxmlformats.org/officeDocument/2006/relationships" id="256" r:id="R30304cb3a6164a56"/>
+    <p:sldId xmlns:r="http://schemas.openxmlformats.org/officeDocument/2006/relationships" id="257" r:id="R5fed2e6a192c4bde"/>
+    <p:sldId xmlns:r="http://schemas.openxmlformats.org/officeDocument/2006/relationships" id="258" r:id="Rc7dd1490062f4830"/>
+    <p:sldId xmlns:r="http://schemas.openxmlformats.org/officeDocument/2006/relationships" id="259" r:id="R1a01fa3dee0e46e5"/>
+    <p:sldId xmlns:r="http://schemas.openxmlformats.org/officeDocument/2006/relationships" id="260" r:id="Rabf57499b5e740b3"/>
+    <p:sldId xmlns:r="http://schemas.openxmlformats.org/officeDocument/2006/relationships" id="261" r:id="R68183cce5dba470c"/>
+    <p:sldId xmlns:r="http://schemas.openxmlformats.org/officeDocument/2006/relationships" id="262" r:id="Rdb22781a79994dec"/>
+    <p:sldId xmlns:r="http://schemas.openxmlformats.org/officeDocument/2006/relationships" id="263" r:id="R9222890e70a14d08"/>
+    <p:sldId xmlns:r="http://schemas.openxmlformats.org/officeDocument/2006/relationships" id="264" r:id="R8555edc579e44ee9"/>
+    <p:sldId xmlns:r="http://schemas.openxmlformats.org/officeDocument/2006/relationships" id="265" r:id="Rb8423ec10f554a8d"/>
+    <p:sldId xmlns:r="http://schemas.openxmlformats.org/officeDocument/2006/relationships" id="266" r:id="Rcd57343ee3184dcc"/>
+    <p:sldId xmlns:r="http://schemas.openxmlformats.org/officeDocument/2006/relationships" id="267" r:id="R078e898745d042c7"/>
   </p:sldIdLst>
   <p:sldSz cx="12192000" cy="6858000"/>
   <p:notesSz cx="6858000" cy="9144000"/>
@@ -873,7 +873,7 @@
           <a:lstStyle xmlns:a="http://schemas.openxmlformats.org/drawingml/2006/main"/>
           <a:p xmlns:a="http://schemas.openxmlformats.org/drawingml/2006/main">
             <a:r>
-              <a:t>I do. Reveal the question, setup and each calculation stage one click at a time. Pupils watch before copying. Model answer: 97 is prime; 144 is square; 125 is cube.</a:t>
+              <a:t>I do. Reveal the question, then reveal each mathematical change one click at a time. Point to the numbers and operation that changed before moving to the next line. Final answer: 97 is prime; 144 is square; 125 is cube.</a:t>
             </a:r>
           </a:p>
         </p:txBody>
@@ -1291,7 +1291,7 @@
   </p:cSld>
   <p:clrMap bg1="lt1" tx1="dk1" bg2="lt2" tx2="dk2" accent1="accent1" accent2="accent2" accent3="accent3" accent4="accent4" accent5="accent5" accent6="accent6" hlink="hlink" folHlink="folHlink"/>
   <p:sldLayoutIdLst>
-    <p:sldLayoutId xmlns:r="http://schemas.openxmlformats.org/officeDocument/2006/relationships" id="2147483649" r:id="Rd6bb063faaa04778"/>
+    <p:sldLayoutId xmlns:r="http://schemas.openxmlformats.org/officeDocument/2006/relationships" id="2147483649" r:id="R66dcc2ee7b6c4604"/>
   </p:sldLayoutIdLst>
   <p:txStyles>
     <p:titleStyle>
@@ -1842,7 +1842,7 @@
           <p:cNvPr id="12" name="">
             <a:extLst xmlns:a="http://schemas.openxmlformats.org/drawingml/2006/main">
               <a:ext uri="{FF2B5EF4-FFF2-40B4-BE49-F238E27FC236}">
-                <a16:creationId xmlns:a16="http://schemas.microsoft.com/office/drawing/2014/main" id="{8477D229-169B-4A9F-8874-10F7A813DCC5}"/>
+                <a16:creationId xmlns:a16="http://schemas.microsoft.com/office/drawing/2014/main" id="{6B384759-FE4A-413A-A063-4C380D869DEB}"/>
               </a:ext>
             </a:extLst>
           </p:cNvPr>
@@ -1874,7 +1874,7 @@
           <p:cNvPr id="2" name="">
             <a:extLst xmlns:a="http://schemas.openxmlformats.org/drawingml/2006/main">
               <a:ext uri="{FF2B5EF4-FFF2-40B4-BE49-F238E27FC236}">
-                <a16:creationId xmlns:a16="http://schemas.microsoft.com/office/drawing/2014/main" id="{0737D006-8686-4A70-898D-DA17D07D08F7}"/>
+                <a16:creationId xmlns:a16="http://schemas.microsoft.com/office/drawing/2014/main" id="{10056953-65EF-492B-ADB1-BF73063B1CE6}"/>
               </a:ext>
             </a:extLst>
           </p:cNvPr>
@@ -1931,7 +1931,7 @@
           <p:cNvPr id="3" name="">
             <a:extLst xmlns:a="http://schemas.openxmlformats.org/drawingml/2006/main">
               <a:ext uri="{FF2B5EF4-FFF2-40B4-BE49-F238E27FC236}">
-                <a16:creationId xmlns:a16="http://schemas.microsoft.com/office/drawing/2014/main" id="{80FD208F-9B88-4557-9F8A-8752A00327F6}"/>
+                <a16:creationId xmlns:a16="http://schemas.microsoft.com/office/drawing/2014/main" id="{6D2E0C92-4EB0-4CE8-8E92-4200A1044193}"/>
               </a:ext>
             </a:extLst>
           </p:cNvPr>
@@ -1965,7 +1965,7 @@
           <p:cNvPr id="4" name="">
             <a:extLst xmlns:a="http://schemas.openxmlformats.org/drawingml/2006/main">
               <a:ext uri="{FF2B5EF4-FFF2-40B4-BE49-F238E27FC236}">
-                <a16:creationId xmlns:a16="http://schemas.microsoft.com/office/drawing/2014/main" id="{B288587B-A6D8-46D0-80D8-3522B0504A07}"/>
+                <a16:creationId xmlns:a16="http://schemas.microsoft.com/office/drawing/2014/main" id="{5C6E915F-002E-446D-8973-B49FFCA27CAB}"/>
               </a:ext>
             </a:extLst>
           </p:cNvPr>
@@ -2022,7 +2022,7 @@
           <p:cNvPr id="5" name="">
             <a:extLst xmlns:a="http://schemas.openxmlformats.org/drawingml/2006/main">
               <a:ext uri="{FF2B5EF4-FFF2-40B4-BE49-F238E27FC236}">
-                <a16:creationId xmlns:a16="http://schemas.microsoft.com/office/drawing/2014/main" id="{363C16BB-669B-40FE-BCE8-2ABA30DC3851}"/>
+                <a16:creationId xmlns:a16="http://schemas.microsoft.com/office/drawing/2014/main" id="{46694C32-F06A-46A7-8BEA-BA1469F4575E}"/>
               </a:ext>
             </a:extLst>
           </p:cNvPr>
@@ -2079,7 +2079,7 @@
           <p:cNvPr id="6" name="">
             <a:extLst xmlns:a="http://schemas.openxmlformats.org/drawingml/2006/main">
               <a:ext uri="{FF2B5EF4-FFF2-40B4-BE49-F238E27FC236}">
-                <a16:creationId xmlns:a16="http://schemas.microsoft.com/office/drawing/2014/main" id="{E7E818C2-CB7A-47F3-856D-3F35F9132F6B}"/>
+                <a16:creationId xmlns:a16="http://schemas.microsoft.com/office/drawing/2014/main" id="{DB482710-3B13-4D3D-A808-795CAFF01382}"/>
               </a:ext>
             </a:extLst>
           </p:cNvPr>
@@ -2113,7 +2113,7 @@
           <p:cNvPr id="7" name="">
             <a:extLst xmlns:a="http://schemas.openxmlformats.org/drawingml/2006/main">
               <a:ext uri="{FF2B5EF4-FFF2-40B4-BE49-F238E27FC236}">
-                <a16:creationId xmlns:a16="http://schemas.microsoft.com/office/drawing/2014/main" id="{F051BBAE-D636-47E6-BD1D-4E25FE061E42}"/>
+                <a16:creationId xmlns:a16="http://schemas.microsoft.com/office/drawing/2014/main" id="{F9FF91EF-DB39-4D24-9654-A3EFD65FA333}"/>
               </a:ext>
             </a:extLst>
           </p:cNvPr>
@@ -2170,7 +2170,7 @@
           <p:cNvPr id="8" name="">
             <a:extLst xmlns:a="http://schemas.openxmlformats.org/drawingml/2006/main">
               <a:ext uri="{FF2B5EF4-FFF2-40B4-BE49-F238E27FC236}">
-                <a16:creationId xmlns:a16="http://schemas.microsoft.com/office/drawing/2014/main" id="{B3B6E609-A4CC-458C-A87C-4D76614AD21A}"/>
+                <a16:creationId xmlns:a16="http://schemas.microsoft.com/office/drawing/2014/main" id="{824B7CAA-C2C3-425E-BE47-9F1407975E90}"/>
               </a:ext>
             </a:extLst>
           </p:cNvPr>
@@ -2227,7 +2227,7 @@
           <p:cNvPr id="9" name="">
             <a:extLst xmlns:a="http://schemas.openxmlformats.org/drawingml/2006/main">
               <a:ext uri="{FF2B5EF4-FFF2-40B4-BE49-F238E27FC236}">
-                <a16:creationId xmlns:a16="http://schemas.microsoft.com/office/drawing/2014/main" id="{908F9E5D-9A7E-4B98-AA0F-CABD3495CB05}"/>
+                <a16:creationId xmlns:a16="http://schemas.microsoft.com/office/drawing/2014/main" id="{15B88B63-9369-4FF3-8AAF-8C933F2700C9}"/>
               </a:ext>
             </a:extLst>
           </p:cNvPr>
@@ -2284,7 +2284,7 @@
           <p:cNvPr id="10" name="">
             <a:extLst xmlns:a="http://schemas.openxmlformats.org/drawingml/2006/main">
               <a:ext uri="{FF2B5EF4-FFF2-40B4-BE49-F238E27FC236}">
-                <a16:creationId xmlns:a16="http://schemas.microsoft.com/office/drawing/2014/main" id="{1BB7C6DA-97F2-4BFE-8989-81BC6613F3F0}"/>
+                <a16:creationId xmlns:a16="http://schemas.microsoft.com/office/drawing/2014/main" id="{6FD79141-C8E4-4376-A5F8-6EDDD952BC1D}"/>
               </a:ext>
             </a:extLst>
           </p:cNvPr>
@@ -2341,7 +2341,7 @@
           <p:cNvPr id="11" name="">
             <a:extLst xmlns:a="http://schemas.openxmlformats.org/drawingml/2006/main">
               <a:ext uri="{FF2B5EF4-FFF2-40B4-BE49-F238E27FC236}">
-                <a16:creationId xmlns:a16="http://schemas.microsoft.com/office/drawing/2014/main" id="{127416A0-0562-482D-B989-BD40EB45A5FC}"/>
+                <a16:creationId xmlns:a16="http://schemas.microsoft.com/office/drawing/2014/main" id="{5DCCBE99-A93A-43A7-BE81-C9683DFCD73F}"/>
               </a:ext>
             </a:extLst>
           </p:cNvPr>
@@ -2396,7 +2396,7 @@
     </p:spTree>
     <p:extLst>
       <p:ext uri="{BB962C8B-B14F-4D97-AF65-F5344CB8AC3E}">
-        <p14:creationId xmlns:p14="http://schemas.microsoft.com/office/powerpoint/2010/main" val="2026119376"/>
+        <p14:creationId xmlns:p14="http://schemas.microsoft.com/office/powerpoint/2010/main" val="671774332"/>
       </p:ext>
     </p:extLst>
   </p:cSld>
@@ -2427,7 +2427,7 @@
           <p:cNvPr id="14" name="">
             <a:extLst xmlns:a="http://schemas.openxmlformats.org/drawingml/2006/main">
               <a:ext uri="{FF2B5EF4-FFF2-40B4-BE49-F238E27FC236}">
-                <a16:creationId xmlns:a16="http://schemas.microsoft.com/office/drawing/2014/main" id="{9C64EA15-6470-40F8-8CD6-2D86F34DE6BD}"/>
+                <a16:creationId xmlns:a16="http://schemas.microsoft.com/office/drawing/2014/main" id="{4AB3065F-C4BC-4D41-BE13-65D5281B1FB9}"/>
               </a:ext>
             </a:extLst>
           </p:cNvPr>
@@ -2459,7 +2459,7 @@
           <p:cNvPr id="2" name="">
             <a:extLst xmlns:a="http://schemas.openxmlformats.org/drawingml/2006/main">
               <a:ext uri="{FF2B5EF4-FFF2-40B4-BE49-F238E27FC236}">
-                <a16:creationId xmlns:a16="http://schemas.microsoft.com/office/drawing/2014/main" id="{78FE677E-E36A-4615-8D85-F297D65E8E1E}"/>
+                <a16:creationId xmlns:a16="http://schemas.microsoft.com/office/drawing/2014/main" id="{47BB16CC-8608-4C71-8C0B-177D61D4B02E}"/>
               </a:ext>
             </a:extLst>
           </p:cNvPr>
@@ -2516,7 +2516,7 @@
           <p:cNvPr id="3" name="">
             <a:extLst xmlns:a="http://schemas.openxmlformats.org/drawingml/2006/main">
               <a:ext uri="{FF2B5EF4-FFF2-40B4-BE49-F238E27FC236}">
-                <a16:creationId xmlns:a16="http://schemas.microsoft.com/office/drawing/2014/main" id="{7CAD22C6-7E58-455D-A9C4-A19EB2518568}"/>
+                <a16:creationId xmlns:a16="http://schemas.microsoft.com/office/drawing/2014/main" id="{E475A438-A05B-42CC-A639-E66E46B8845C}"/>
               </a:ext>
             </a:extLst>
           </p:cNvPr>
@@ -2548,7 +2548,7 @@
           <p:cNvPr id="4" name="">
             <a:extLst xmlns:a="http://schemas.openxmlformats.org/drawingml/2006/main">
               <a:ext uri="{FF2B5EF4-FFF2-40B4-BE49-F238E27FC236}">
-                <a16:creationId xmlns:a16="http://schemas.microsoft.com/office/drawing/2014/main" id="{B23E07A9-3625-4FE1-A24A-71539135523B}"/>
+                <a16:creationId xmlns:a16="http://schemas.microsoft.com/office/drawing/2014/main" id="{91D84A3B-BA6F-4EF1-BFD7-31A0851A582F}"/>
               </a:ext>
             </a:extLst>
           </p:cNvPr>
@@ -2605,7 +2605,7 @@
           <p:cNvPr id="5" name="">
             <a:extLst xmlns:a="http://schemas.openxmlformats.org/drawingml/2006/main">
               <a:ext uri="{FF2B5EF4-FFF2-40B4-BE49-F238E27FC236}">
-                <a16:creationId xmlns:a16="http://schemas.microsoft.com/office/drawing/2014/main" id="{073B64D2-B3A4-44FF-821C-4525E7034A2B}"/>
+                <a16:creationId xmlns:a16="http://schemas.microsoft.com/office/drawing/2014/main" id="{3FB09F57-5964-43F5-9971-731D9BF6B733}"/>
               </a:ext>
             </a:extLst>
           </p:cNvPr>
@@ -2662,7 +2662,7 @@
           <p:cNvPr id="6" name="">
             <a:extLst xmlns:a="http://schemas.openxmlformats.org/drawingml/2006/main">
               <a:ext uri="{FF2B5EF4-FFF2-40B4-BE49-F238E27FC236}">
-                <a16:creationId xmlns:a16="http://schemas.microsoft.com/office/drawing/2014/main" id="{42592841-B4FF-4B42-B6CA-8AD6AA527958}"/>
+                <a16:creationId xmlns:a16="http://schemas.microsoft.com/office/drawing/2014/main" id="{C6229B75-723B-4FEE-AE01-A834E39EA17F}"/>
               </a:ext>
             </a:extLst>
           </p:cNvPr>
@@ -2719,7 +2719,7 @@
           <p:cNvPr id="7" name="">
             <a:extLst xmlns:a="http://schemas.openxmlformats.org/drawingml/2006/main">
               <a:ext uri="{FF2B5EF4-FFF2-40B4-BE49-F238E27FC236}">
-                <a16:creationId xmlns:a16="http://schemas.microsoft.com/office/drawing/2014/main" id="{BE0687D3-80CC-43E3-AD9B-37754E213862}"/>
+                <a16:creationId xmlns:a16="http://schemas.microsoft.com/office/drawing/2014/main" id="{FB43D027-691C-43D4-8B7A-5FE415968E78}"/>
               </a:ext>
             </a:extLst>
           </p:cNvPr>
@@ -2751,7 +2751,7 @@
           <p:cNvPr id="8" name="">
             <a:extLst xmlns:a="http://schemas.openxmlformats.org/drawingml/2006/main">
               <a:ext uri="{FF2B5EF4-FFF2-40B4-BE49-F238E27FC236}">
-                <a16:creationId xmlns:a16="http://schemas.microsoft.com/office/drawing/2014/main" id="{759CAA62-1B11-47D4-BD38-D7D3A6C22A97}"/>
+                <a16:creationId xmlns:a16="http://schemas.microsoft.com/office/drawing/2014/main" id="{CE387F64-B631-439A-B9C6-2964105E4B6B}"/>
               </a:ext>
             </a:extLst>
           </p:cNvPr>
@@ -2808,7 +2808,7 @@
           <p:cNvPr id="9" name="">
             <a:extLst xmlns:a="http://schemas.openxmlformats.org/drawingml/2006/main">
               <a:ext uri="{FF2B5EF4-FFF2-40B4-BE49-F238E27FC236}">
-                <a16:creationId xmlns:a16="http://schemas.microsoft.com/office/drawing/2014/main" id="{01107444-9EB4-4479-8FD0-3F41C4F1F720}"/>
+                <a16:creationId xmlns:a16="http://schemas.microsoft.com/office/drawing/2014/main" id="{1E510CF8-E956-451C-BCA1-B71A549B0834}"/>
               </a:ext>
             </a:extLst>
           </p:cNvPr>
@@ -2865,7 +2865,7 @@
           <p:cNvPr id="10" name="">
             <a:extLst xmlns:a="http://schemas.openxmlformats.org/drawingml/2006/main">
               <a:ext uri="{FF2B5EF4-FFF2-40B4-BE49-F238E27FC236}">
-                <a16:creationId xmlns:a16="http://schemas.microsoft.com/office/drawing/2014/main" id="{6DF68D00-FA10-4BAD-97F6-604632BE6A39}"/>
+                <a16:creationId xmlns:a16="http://schemas.microsoft.com/office/drawing/2014/main" id="{E52137DD-3FC6-4769-A196-7070E0855D22}"/>
               </a:ext>
             </a:extLst>
           </p:cNvPr>
@@ -2922,7 +2922,7 @@
           <p:cNvPr id="11" name="">
             <a:extLst xmlns:a="http://schemas.openxmlformats.org/drawingml/2006/main">
               <a:ext uri="{FF2B5EF4-FFF2-40B4-BE49-F238E27FC236}">
-                <a16:creationId xmlns:a16="http://schemas.microsoft.com/office/drawing/2014/main" id="{A1CAF81F-63D7-4872-9389-1BBA22AC4C44}"/>
+                <a16:creationId xmlns:a16="http://schemas.microsoft.com/office/drawing/2014/main" id="{E6DB61B7-7065-4C01-867B-278B798B35D1}"/>
               </a:ext>
             </a:extLst>
           </p:cNvPr>
@@ -2979,7 +2979,7 @@
           <p:cNvPr id="12" name="">
             <a:extLst xmlns:a="http://schemas.openxmlformats.org/drawingml/2006/main">
               <a:ext uri="{FF2B5EF4-FFF2-40B4-BE49-F238E27FC236}">
-                <a16:creationId xmlns:a16="http://schemas.microsoft.com/office/drawing/2014/main" id="{31077240-7904-4F46-A4D8-4F3941C24DE3}"/>
+                <a16:creationId xmlns:a16="http://schemas.microsoft.com/office/drawing/2014/main" id="{02D81314-1252-4F75-A790-692FB1ACAF5A}"/>
               </a:ext>
             </a:extLst>
           </p:cNvPr>
@@ -3036,7 +3036,7 @@
           <p:cNvPr id="13" name="">
             <a:extLst xmlns:a="http://schemas.openxmlformats.org/drawingml/2006/main">
               <a:ext uri="{FF2B5EF4-FFF2-40B4-BE49-F238E27FC236}">
-                <a16:creationId xmlns:a16="http://schemas.microsoft.com/office/drawing/2014/main" id="{F233B0EE-06A1-4E32-9672-1B6BA1ADA50C}"/>
+                <a16:creationId xmlns:a16="http://schemas.microsoft.com/office/drawing/2014/main" id="{C969CA31-8862-44DF-96AB-3590A9A5C595}"/>
               </a:ext>
             </a:extLst>
           </p:cNvPr>
@@ -3091,7 +3091,7 @@
     </p:spTree>
     <p:extLst>
       <p:ext uri="{BB962C8B-B14F-4D97-AF65-F5344CB8AC3E}">
-        <p14:creationId xmlns:p14="http://schemas.microsoft.com/office/powerpoint/2010/main" val="43094652"/>
+        <p14:creationId xmlns:p14="http://schemas.microsoft.com/office/powerpoint/2010/main" val="597186607"/>
       </p:ext>
     </p:extLst>
   </p:cSld>
@@ -3292,7 +3292,7 @@
           <p:cNvPr id="19" name="">
             <a:extLst xmlns:a="http://schemas.openxmlformats.org/drawingml/2006/main">
               <a:ext uri="{FF2B5EF4-FFF2-40B4-BE49-F238E27FC236}">
-                <a16:creationId xmlns:a16="http://schemas.microsoft.com/office/drawing/2014/main" id="{3F54F5FF-0D14-4A73-A2B7-57C0857FB0BA}"/>
+                <a16:creationId xmlns:a16="http://schemas.microsoft.com/office/drawing/2014/main" id="{EE8C292B-1D76-4450-8825-46240A3F2E1B}"/>
               </a:ext>
             </a:extLst>
           </p:cNvPr>
@@ -3324,7 +3324,7 @@
           <p:cNvPr id="2" name="">
             <a:extLst xmlns:a="http://schemas.openxmlformats.org/drawingml/2006/main">
               <a:ext uri="{FF2B5EF4-FFF2-40B4-BE49-F238E27FC236}">
-                <a16:creationId xmlns:a16="http://schemas.microsoft.com/office/drawing/2014/main" id="{13AABB7D-38D4-4FFE-A6FB-1118392C41B1}"/>
+                <a16:creationId xmlns:a16="http://schemas.microsoft.com/office/drawing/2014/main" id="{4C8F80BF-8F43-4FBF-9BF6-DC6A87664735}"/>
               </a:ext>
             </a:extLst>
           </p:cNvPr>
@@ -3381,7 +3381,7 @@
           <p:cNvPr id="3" name="">
             <a:extLst xmlns:a="http://schemas.openxmlformats.org/drawingml/2006/main">
               <a:ext uri="{FF2B5EF4-FFF2-40B4-BE49-F238E27FC236}">
-                <a16:creationId xmlns:a16="http://schemas.microsoft.com/office/drawing/2014/main" id="{24287E64-43C8-46EF-88BA-B4EF659C0F73}"/>
+                <a16:creationId xmlns:a16="http://schemas.microsoft.com/office/drawing/2014/main" id="{4E7AD690-C6D1-4B40-A867-49753ECB9765}"/>
               </a:ext>
             </a:extLst>
           </p:cNvPr>
@@ -3413,7 +3413,7 @@
           <p:cNvPr id="4" name="">
             <a:extLst xmlns:a="http://schemas.openxmlformats.org/drawingml/2006/main">
               <a:ext uri="{FF2B5EF4-FFF2-40B4-BE49-F238E27FC236}">
-                <a16:creationId xmlns:a16="http://schemas.microsoft.com/office/drawing/2014/main" id="{E6BE468E-6F18-45A4-860B-53A20C0E14AA}"/>
+                <a16:creationId xmlns:a16="http://schemas.microsoft.com/office/drawing/2014/main" id="{C1EF9104-5E90-4A63-824E-EFAF3BAD8A2D}"/>
               </a:ext>
             </a:extLst>
           </p:cNvPr>
@@ -3470,7 +3470,7 @@
           <p:cNvPr id="5" name="">
             <a:extLst xmlns:a="http://schemas.openxmlformats.org/drawingml/2006/main">
               <a:ext uri="{FF2B5EF4-FFF2-40B4-BE49-F238E27FC236}">
-                <a16:creationId xmlns:a16="http://schemas.microsoft.com/office/drawing/2014/main" id="{6641D291-5A20-4723-A8B5-B0058598C2FF}"/>
+                <a16:creationId xmlns:a16="http://schemas.microsoft.com/office/drawing/2014/main" id="{EE0520BF-17BC-4840-BD73-A9E8BD53BCB0}"/>
               </a:ext>
             </a:extLst>
           </p:cNvPr>
@@ -3527,7 +3527,7 @@
           <p:cNvPr id="6" name="">
             <a:extLst xmlns:a="http://schemas.openxmlformats.org/drawingml/2006/main">
               <a:ext uri="{FF2B5EF4-FFF2-40B4-BE49-F238E27FC236}">
-                <a16:creationId xmlns:a16="http://schemas.microsoft.com/office/drawing/2014/main" id="{D09079B8-C11A-45AF-8169-492E2D716925}"/>
+                <a16:creationId xmlns:a16="http://schemas.microsoft.com/office/drawing/2014/main" id="{7EA16C06-11D0-464B-ADED-D501E363247E}"/>
               </a:ext>
             </a:extLst>
           </p:cNvPr>
@@ -3584,7 +3584,7 @@
           <p:cNvPr id="7" name="">
             <a:extLst xmlns:a="http://schemas.openxmlformats.org/drawingml/2006/main">
               <a:ext uri="{FF2B5EF4-FFF2-40B4-BE49-F238E27FC236}">
-                <a16:creationId xmlns:a16="http://schemas.microsoft.com/office/drawing/2014/main" id="{6C728FA9-2346-431D-AF16-6FDC7FC6BE78}"/>
+                <a16:creationId xmlns:a16="http://schemas.microsoft.com/office/drawing/2014/main" id="{B3EE1066-226D-4E32-8994-731AC1B4477C}"/>
               </a:ext>
             </a:extLst>
           </p:cNvPr>
@@ -3616,7 +3616,7 @@
           <p:cNvPr id="8" name="">
             <a:extLst xmlns:a="http://schemas.openxmlformats.org/drawingml/2006/main">
               <a:ext uri="{FF2B5EF4-FFF2-40B4-BE49-F238E27FC236}">
-                <a16:creationId xmlns:a16="http://schemas.microsoft.com/office/drawing/2014/main" id="{8452A2FF-42B7-4D92-8900-A1F6506E0298}"/>
+                <a16:creationId xmlns:a16="http://schemas.microsoft.com/office/drawing/2014/main" id="{DF93DDA5-7159-461F-9BF6-9DA764D931C0}"/>
               </a:ext>
             </a:extLst>
           </p:cNvPr>
@@ -3673,7 +3673,7 @@
           <p:cNvPr id="9" name="">
             <a:extLst xmlns:a="http://schemas.openxmlformats.org/drawingml/2006/main">
               <a:ext uri="{FF2B5EF4-FFF2-40B4-BE49-F238E27FC236}">
-                <a16:creationId xmlns:a16="http://schemas.microsoft.com/office/drawing/2014/main" id="{498E3B99-2F61-4C1F-9095-6D9B21277449}"/>
+                <a16:creationId xmlns:a16="http://schemas.microsoft.com/office/drawing/2014/main" id="{3B4630C4-9311-490D-A5C3-9541A96A2497}"/>
               </a:ext>
             </a:extLst>
           </p:cNvPr>
@@ -3730,7 +3730,7 @@
           <p:cNvPr id="10" name="">
             <a:extLst xmlns:a="http://schemas.openxmlformats.org/drawingml/2006/main">
               <a:ext uri="{FF2B5EF4-FFF2-40B4-BE49-F238E27FC236}">
-                <a16:creationId xmlns:a16="http://schemas.microsoft.com/office/drawing/2014/main" id="{36619FC1-D547-4E3F-9B07-53D433D9E71F}"/>
+                <a16:creationId xmlns:a16="http://schemas.microsoft.com/office/drawing/2014/main" id="{D90A299E-F294-4BBC-A3EA-97C5A2DD5AE1}"/>
               </a:ext>
             </a:extLst>
           </p:cNvPr>
@@ -3787,7 +3787,7 @@
           <p:cNvPr id="11" name="">
             <a:extLst xmlns:a="http://schemas.openxmlformats.org/drawingml/2006/main">
               <a:ext uri="{FF2B5EF4-FFF2-40B4-BE49-F238E27FC236}">
-                <a16:creationId xmlns:a16="http://schemas.microsoft.com/office/drawing/2014/main" id="{61769250-13CE-4404-AA47-76BAD0A5BCEA}"/>
+                <a16:creationId xmlns:a16="http://schemas.microsoft.com/office/drawing/2014/main" id="{FB1082C1-AEB1-43FF-B3EA-782991B64137}"/>
               </a:ext>
             </a:extLst>
           </p:cNvPr>
@@ -3821,7 +3821,7 @@
           <p:cNvPr id="12" name="">
             <a:extLst xmlns:a="http://schemas.openxmlformats.org/drawingml/2006/main">
               <a:ext uri="{FF2B5EF4-FFF2-40B4-BE49-F238E27FC236}">
-                <a16:creationId xmlns:a16="http://schemas.microsoft.com/office/drawing/2014/main" id="{CF1CC0EC-8701-49EA-9E85-E2EB3B4F69AB}"/>
+                <a16:creationId xmlns:a16="http://schemas.microsoft.com/office/drawing/2014/main" id="{84BAEA75-E9E2-4D5D-9B29-14F35B022275}"/>
               </a:ext>
             </a:extLst>
           </p:cNvPr>
@@ -3878,7 +3878,7 @@
           <p:cNvPr id="13" name="">
             <a:extLst xmlns:a="http://schemas.openxmlformats.org/drawingml/2006/main">
               <a:ext uri="{FF2B5EF4-FFF2-40B4-BE49-F238E27FC236}">
-                <a16:creationId xmlns:a16="http://schemas.microsoft.com/office/drawing/2014/main" id="{7F461EC4-898A-417E-B93E-35112C0D41F6}"/>
+                <a16:creationId xmlns:a16="http://schemas.microsoft.com/office/drawing/2014/main" id="{B17E1B83-CD95-4C7C-B748-14F58A5192FC}"/>
               </a:ext>
             </a:extLst>
           </p:cNvPr>
@@ -3935,7 +3935,7 @@
           <p:cNvPr id="14" name="">
             <a:extLst xmlns:a="http://schemas.openxmlformats.org/drawingml/2006/main">
               <a:ext uri="{FF2B5EF4-FFF2-40B4-BE49-F238E27FC236}">
-                <a16:creationId xmlns:a16="http://schemas.microsoft.com/office/drawing/2014/main" id="{5257A655-B49A-4739-A85D-F564E90DD1D9}"/>
+                <a16:creationId xmlns:a16="http://schemas.microsoft.com/office/drawing/2014/main" id="{46643A5E-7DAF-4C8B-BBDA-B3CB3C1F1AC9}"/>
               </a:ext>
             </a:extLst>
           </p:cNvPr>
@@ -3992,7 +3992,7 @@
           <p:cNvPr id="15" name="">
             <a:extLst xmlns:a="http://schemas.openxmlformats.org/drawingml/2006/main">
               <a:ext uri="{FF2B5EF4-FFF2-40B4-BE49-F238E27FC236}">
-                <a16:creationId xmlns:a16="http://schemas.microsoft.com/office/drawing/2014/main" id="{0FE7AC9E-A16B-44F1-93CD-28C2263D5ED4}"/>
+                <a16:creationId xmlns:a16="http://schemas.microsoft.com/office/drawing/2014/main" id="{22764F10-4D3F-48EB-8A5D-87F0084E3FA4}"/>
               </a:ext>
             </a:extLst>
           </p:cNvPr>
@@ -4026,7 +4026,7 @@
           <p:cNvPr id="16" name="">
             <a:extLst xmlns:a="http://schemas.openxmlformats.org/drawingml/2006/main">
               <a:ext uri="{FF2B5EF4-FFF2-40B4-BE49-F238E27FC236}">
-                <a16:creationId xmlns:a16="http://schemas.microsoft.com/office/drawing/2014/main" id="{EBFC3A7C-DC89-4D9B-AE53-3BBF687C1120}"/>
+                <a16:creationId xmlns:a16="http://schemas.microsoft.com/office/drawing/2014/main" id="{96F2735B-9E48-4F53-9456-41B1881E8819}"/>
               </a:ext>
             </a:extLst>
           </p:cNvPr>
@@ -4083,7 +4083,7 @@
           <p:cNvPr id="17" name="">
             <a:extLst xmlns:a="http://schemas.openxmlformats.org/drawingml/2006/main">
               <a:ext uri="{FF2B5EF4-FFF2-40B4-BE49-F238E27FC236}">
-                <a16:creationId xmlns:a16="http://schemas.microsoft.com/office/drawing/2014/main" id="{4B11AC40-F21E-4454-B407-A65CA80C42D3}"/>
+                <a16:creationId xmlns:a16="http://schemas.microsoft.com/office/drawing/2014/main" id="{7A7E0F4D-C1A3-4E4C-81FA-5DF396BAEDF0}"/>
               </a:ext>
             </a:extLst>
           </p:cNvPr>
@@ -4140,7 +4140,7 @@
           <p:cNvPr id="18" name="">
             <a:extLst xmlns:a="http://schemas.openxmlformats.org/drawingml/2006/main">
               <a:ext uri="{FF2B5EF4-FFF2-40B4-BE49-F238E27FC236}">
-                <a16:creationId xmlns:a16="http://schemas.microsoft.com/office/drawing/2014/main" id="{90A32762-623C-4A2D-9A11-6B6EAAD218FA}"/>
+                <a16:creationId xmlns:a16="http://schemas.microsoft.com/office/drawing/2014/main" id="{910964A9-70BF-496B-81A3-1B2508F97A57}"/>
               </a:ext>
             </a:extLst>
           </p:cNvPr>
@@ -4195,7 +4195,7 @@
     </p:spTree>
     <p:extLst>
       <p:ext uri="{BB962C8B-B14F-4D97-AF65-F5344CB8AC3E}">
-        <p14:creationId xmlns:p14="http://schemas.microsoft.com/office/powerpoint/2010/main" val="2115676622"/>
+        <p14:creationId xmlns:p14="http://schemas.microsoft.com/office/powerpoint/2010/main" val="1773244166"/>
       </p:ext>
     </p:extLst>
   </p:cSld>
@@ -4350,7 +4350,7 @@
           <p:cNvPr id="23" name="">
             <a:extLst xmlns:a="http://schemas.openxmlformats.org/drawingml/2006/main">
               <a:ext uri="{FF2B5EF4-FFF2-40B4-BE49-F238E27FC236}">
-                <a16:creationId xmlns:a16="http://schemas.microsoft.com/office/drawing/2014/main" id="{E85A9CB4-037B-40D3-BCD5-F397C817E46C}"/>
+                <a16:creationId xmlns:a16="http://schemas.microsoft.com/office/drawing/2014/main" id="{8124AC06-CA92-45BD-9B93-1180A8769447}"/>
               </a:ext>
             </a:extLst>
           </p:cNvPr>
@@ -4382,7 +4382,7 @@
           <p:cNvPr id="2" name="">
             <a:extLst xmlns:a="http://schemas.openxmlformats.org/drawingml/2006/main">
               <a:ext uri="{FF2B5EF4-FFF2-40B4-BE49-F238E27FC236}">
-                <a16:creationId xmlns:a16="http://schemas.microsoft.com/office/drawing/2014/main" id="{54F36B02-2002-4E22-A2A0-D011982EB0E5}"/>
+                <a16:creationId xmlns:a16="http://schemas.microsoft.com/office/drawing/2014/main" id="{AE54417B-F8FD-4193-9D89-2C4982BA2286}"/>
               </a:ext>
             </a:extLst>
           </p:cNvPr>
@@ -4439,7 +4439,7 @@
           <p:cNvPr id="3" name="">
             <a:extLst xmlns:a="http://schemas.openxmlformats.org/drawingml/2006/main">
               <a:ext uri="{FF2B5EF4-FFF2-40B4-BE49-F238E27FC236}">
-                <a16:creationId xmlns:a16="http://schemas.microsoft.com/office/drawing/2014/main" id="{C82B80FB-CD85-47C6-88B3-6A42290754C4}"/>
+                <a16:creationId xmlns:a16="http://schemas.microsoft.com/office/drawing/2014/main" id="{B3C3DB12-C23A-476F-9C27-7F2CDDA59E1B}"/>
               </a:ext>
             </a:extLst>
           </p:cNvPr>
@@ -4471,7 +4471,7 @@
           <p:cNvPr id="4" name="">
             <a:extLst xmlns:a="http://schemas.openxmlformats.org/drawingml/2006/main">
               <a:ext uri="{FF2B5EF4-FFF2-40B4-BE49-F238E27FC236}">
-                <a16:creationId xmlns:a16="http://schemas.microsoft.com/office/drawing/2014/main" id="{DD609FC9-E345-48F4-AB2C-E986981529CC}"/>
+                <a16:creationId xmlns:a16="http://schemas.microsoft.com/office/drawing/2014/main" id="{B3356777-D4CE-4834-898E-27FFC944E8DB}"/>
               </a:ext>
             </a:extLst>
           </p:cNvPr>
@@ -4528,7 +4528,7 @@
           <p:cNvPr id="5" name="">
             <a:extLst xmlns:a="http://schemas.openxmlformats.org/drawingml/2006/main">
               <a:ext uri="{FF2B5EF4-FFF2-40B4-BE49-F238E27FC236}">
-                <a16:creationId xmlns:a16="http://schemas.microsoft.com/office/drawing/2014/main" id="{134ECA2B-FF70-4DC9-ADA7-4C69149583D7}"/>
+                <a16:creationId xmlns:a16="http://schemas.microsoft.com/office/drawing/2014/main" id="{9670E7FE-8D49-49BA-807E-56BB16D6AE43}"/>
               </a:ext>
             </a:extLst>
           </p:cNvPr>
@@ -4585,7 +4585,7 @@
           <p:cNvPr id="6" name="">
             <a:extLst xmlns:a="http://schemas.openxmlformats.org/drawingml/2006/main">
               <a:ext uri="{FF2B5EF4-FFF2-40B4-BE49-F238E27FC236}">
-                <a16:creationId xmlns:a16="http://schemas.microsoft.com/office/drawing/2014/main" id="{5DC2961C-F4FA-4A43-AF7E-9460565C24CA}"/>
+                <a16:creationId xmlns:a16="http://schemas.microsoft.com/office/drawing/2014/main" id="{258A5649-B9D6-4F28-AC13-C1EDD4266130}"/>
               </a:ext>
             </a:extLst>
           </p:cNvPr>
@@ -4642,7 +4642,7 @@
           <p:cNvPr id="7" name="">
             <a:extLst xmlns:a="http://schemas.openxmlformats.org/drawingml/2006/main">
               <a:ext uri="{FF2B5EF4-FFF2-40B4-BE49-F238E27FC236}">
-                <a16:creationId xmlns:a16="http://schemas.microsoft.com/office/drawing/2014/main" id="{83DE1725-E562-4EC4-9F8E-CD23E86F0983}"/>
+                <a16:creationId xmlns:a16="http://schemas.microsoft.com/office/drawing/2014/main" id="{DDE960CD-A454-411B-9698-DB4DC47C45A1}"/>
               </a:ext>
             </a:extLst>
           </p:cNvPr>
@@ -4674,7 +4674,7 @@
           <p:cNvPr id="8" name="">
             <a:extLst xmlns:a="http://schemas.openxmlformats.org/drawingml/2006/main">
               <a:ext uri="{FF2B5EF4-FFF2-40B4-BE49-F238E27FC236}">
-                <a16:creationId xmlns:a16="http://schemas.microsoft.com/office/drawing/2014/main" id="{06FACE08-78F8-4C46-BCC0-495426DDD510}"/>
+                <a16:creationId xmlns:a16="http://schemas.microsoft.com/office/drawing/2014/main" id="{74AA006E-241D-4A78-8E0B-57D88C842C64}"/>
               </a:ext>
             </a:extLst>
           </p:cNvPr>
@@ -4731,7 +4731,7 @@
           <p:cNvPr id="9" name="">
             <a:extLst xmlns:a="http://schemas.openxmlformats.org/drawingml/2006/main">
               <a:ext uri="{FF2B5EF4-FFF2-40B4-BE49-F238E27FC236}">
-                <a16:creationId xmlns:a16="http://schemas.microsoft.com/office/drawing/2014/main" id="{2EC30C30-B34C-4670-9EE1-8AAD062B34CF}"/>
+                <a16:creationId xmlns:a16="http://schemas.microsoft.com/office/drawing/2014/main" id="{E6E437B8-70B2-4BB4-B6E5-F3D41D451438}"/>
               </a:ext>
             </a:extLst>
           </p:cNvPr>
@@ -4788,7 +4788,7 @@
           <p:cNvPr id="10" name="">
             <a:extLst xmlns:a="http://schemas.openxmlformats.org/drawingml/2006/main">
               <a:ext uri="{FF2B5EF4-FFF2-40B4-BE49-F238E27FC236}">
-                <a16:creationId xmlns:a16="http://schemas.microsoft.com/office/drawing/2014/main" id="{0E23A4F1-4E2F-4C4C-9B97-055F5425A95E}"/>
+                <a16:creationId xmlns:a16="http://schemas.microsoft.com/office/drawing/2014/main" id="{1080AB46-AE37-4D80-9177-15DAD7DC21BB}"/>
               </a:ext>
             </a:extLst>
           </p:cNvPr>
@@ -4822,7 +4822,7 @@
           <p:cNvPr id="11" name="">
             <a:extLst xmlns:a="http://schemas.openxmlformats.org/drawingml/2006/main">
               <a:ext uri="{FF2B5EF4-FFF2-40B4-BE49-F238E27FC236}">
-                <a16:creationId xmlns:a16="http://schemas.microsoft.com/office/drawing/2014/main" id="{D7628BEC-CF2A-4486-8158-17ACAD0E4A0A}"/>
+                <a16:creationId xmlns:a16="http://schemas.microsoft.com/office/drawing/2014/main" id="{61231637-F674-4CCA-BF1F-43388A89B417}"/>
               </a:ext>
             </a:extLst>
           </p:cNvPr>
@@ -4854,7 +4854,7 @@
           <p:cNvPr id="12" name="">
             <a:extLst xmlns:a="http://schemas.openxmlformats.org/drawingml/2006/main">
               <a:ext uri="{FF2B5EF4-FFF2-40B4-BE49-F238E27FC236}">
-                <a16:creationId xmlns:a16="http://schemas.microsoft.com/office/drawing/2014/main" id="{4F0D9EDF-99CA-4EB1-956A-F4D104940A27}"/>
+                <a16:creationId xmlns:a16="http://schemas.microsoft.com/office/drawing/2014/main" id="{4F23C3EC-E76A-4595-879F-D0F90B20E70D}"/>
               </a:ext>
             </a:extLst>
           </p:cNvPr>
@@ -4911,7 +4911,7 @@
           <p:cNvPr id="13" name="">
             <a:extLst xmlns:a="http://schemas.openxmlformats.org/drawingml/2006/main">
               <a:ext uri="{FF2B5EF4-FFF2-40B4-BE49-F238E27FC236}">
-                <a16:creationId xmlns:a16="http://schemas.microsoft.com/office/drawing/2014/main" id="{8F15285C-30B8-42D6-9F61-3B2B6DB5D8EA}"/>
+                <a16:creationId xmlns:a16="http://schemas.microsoft.com/office/drawing/2014/main" id="{4E502ED2-0F60-45AE-BB03-B2A3350D9283}"/>
               </a:ext>
             </a:extLst>
           </p:cNvPr>
@@ -4968,7 +4968,7 @@
           <p:cNvPr id="14" name="">
             <a:extLst xmlns:a="http://schemas.openxmlformats.org/drawingml/2006/main">
               <a:ext uri="{FF2B5EF4-FFF2-40B4-BE49-F238E27FC236}">
-                <a16:creationId xmlns:a16="http://schemas.microsoft.com/office/drawing/2014/main" id="{7E86B07F-ABBC-40EF-B646-9A2EBC9E6EDA}"/>
+                <a16:creationId xmlns:a16="http://schemas.microsoft.com/office/drawing/2014/main" id="{50E9F888-E94D-483A-AA4D-04562E95C21F}"/>
               </a:ext>
             </a:extLst>
           </p:cNvPr>
@@ -5002,7 +5002,7 @@
           <p:cNvPr id="15" name="">
             <a:extLst xmlns:a="http://schemas.openxmlformats.org/drawingml/2006/main">
               <a:ext uri="{FF2B5EF4-FFF2-40B4-BE49-F238E27FC236}">
-                <a16:creationId xmlns:a16="http://schemas.microsoft.com/office/drawing/2014/main" id="{510232AB-5C3C-4564-8240-A76136EE3D05}"/>
+                <a16:creationId xmlns:a16="http://schemas.microsoft.com/office/drawing/2014/main" id="{718D3961-02EB-4979-85DB-7821FC39A386}"/>
               </a:ext>
             </a:extLst>
           </p:cNvPr>
@@ -5034,7 +5034,7 @@
           <p:cNvPr id="16" name="">
             <a:extLst xmlns:a="http://schemas.openxmlformats.org/drawingml/2006/main">
               <a:ext uri="{FF2B5EF4-FFF2-40B4-BE49-F238E27FC236}">
-                <a16:creationId xmlns:a16="http://schemas.microsoft.com/office/drawing/2014/main" id="{C6AA49AA-B5D0-4206-9964-F82CF0567C92}"/>
+                <a16:creationId xmlns:a16="http://schemas.microsoft.com/office/drawing/2014/main" id="{2578E409-7DF7-4F24-AD44-54D1E098D1AE}"/>
               </a:ext>
             </a:extLst>
           </p:cNvPr>
@@ -5091,7 +5091,7 @@
           <p:cNvPr id="17" name="">
             <a:extLst xmlns:a="http://schemas.openxmlformats.org/drawingml/2006/main">
               <a:ext uri="{FF2B5EF4-FFF2-40B4-BE49-F238E27FC236}">
-                <a16:creationId xmlns:a16="http://schemas.microsoft.com/office/drawing/2014/main" id="{EADDEF07-3FF3-4216-83C2-F71B5A2A682E}"/>
+                <a16:creationId xmlns:a16="http://schemas.microsoft.com/office/drawing/2014/main" id="{ACE911A6-4444-4036-A597-CA49A994D7E6}"/>
               </a:ext>
             </a:extLst>
           </p:cNvPr>
@@ -5148,7 +5148,7 @@
           <p:cNvPr id="18" name="">
             <a:extLst xmlns:a="http://schemas.openxmlformats.org/drawingml/2006/main">
               <a:ext uri="{FF2B5EF4-FFF2-40B4-BE49-F238E27FC236}">
-                <a16:creationId xmlns:a16="http://schemas.microsoft.com/office/drawing/2014/main" id="{703CDC45-E5F1-45A1-9CAD-522367EA3EE0}"/>
+                <a16:creationId xmlns:a16="http://schemas.microsoft.com/office/drawing/2014/main" id="{FAF7D32D-CA0A-4CF4-8CDB-B1A1B22953CD}"/>
               </a:ext>
             </a:extLst>
           </p:cNvPr>
@@ -5182,7 +5182,7 @@
           <p:cNvPr id="19" name="">
             <a:extLst xmlns:a="http://schemas.openxmlformats.org/drawingml/2006/main">
               <a:ext uri="{FF2B5EF4-FFF2-40B4-BE49-F238E27FC236}">
-                <a16:creationId xmlns:a16="http://schemas.microsoft.com/office/drawing/2014/main" id="{2EA07513-6EE1-46F2-8EAB-5C26273D684E}"/>
+                <a16:creationId xmlns:a16="http://schemas.microsoft.com/office/drawing/2014/main" id="{AB35910C-AF14-492A-8A3B-B15906A228FD}"/>
               </a:ext>
             </a:extLst>
           </p:cNvPr>
@@ -5214,7 +5214,7 @@
           <p:cNvPr id="20" name="">
             <a:extLst xmlns:a="http://schemas.openxmlformats.org/drawingml/2006/main">
               <a:ext uri="{FF2B5EF4-FFF2-40B4-BE49-F238E27FC236}">
-                <a16:creationId xmlns:a16="http://schemas.microsoft.com/office/drawing/2014/main" id="{9373FF95-3EE0-439A-9953-F6B2F0D80521}"/>
+                <a16:creationId xmlns:a16="http://schemas.microsoft.com/office/drawing/2014/main" id="{C1F2B6B7-C9E0-4C9D-996A-6946215E1C8E}"/>
               </a:ext>
             </a:extLst>
           </p:cNvPr>
@@ -5271,7 +5271,7 @@
           <p:cNvPr id="21" name="">
             <a:extLst xmlns:a="http://schemas.openxmlformats.org/drawingml/2006/main">
               <a:ext uri="{FF2B5EF4-FFF2-40B4-BE49-F238E27FC236}">
-                <a16:creationId xmlns:a16="http://schemas.microsoft.com/office/drawing/2014/main" id="{C0669E37-1917-4D38-98A6-D40BCF31C778}"/>
+                <a16:creationId xmlns:a16="http://schemas.microsoft.com/office/drawing/2014/main" id="{BD70FAAB-D929-4730-8000-44F3367524F1}"/>
               </a:ext>
             </a:extLst>
           </p:cNvPr>
@@ -5328,7 +5328,7 @@
           <p:cNvPr id="22" name="">
             <a:extLst xmlns:a="http://schemas.openxmlformats.org/drawingml/2006/main">
               <a:ext uri="{FF2B5EF4-FFF2-40B4-BE49-F238E27FC236}">
-                <a16:creationId xmlns:a16="http://schemas.microsoft.com/office/drawing/2014/main" id="{8EBE9AB8-8BE1-49D8-8FCE-8E6337105929}"/>
+                <a16:creationId xmlns:a16="http://schemas.microsoft.com/office/drawing/2014/main" id="{65B7753F-C1A7-4C90-A955-DD731C27F585}"/>
               </a:ext>
             </a:extLst>
           </p:cNvPr>
@@ -5383,7 +5383,7 @@
     </p:spTree>
     <p:extLst>
       <p:ext uri="{BB962C8B-B14F-4D97-AF65-F5344CB8AC3E}">
-        <p14:creationId xmlns:p14="http://schemas.microsoft.com/office/powerpoint/2010/main" val="764892833"/>
+        <p14:creationId xmlns:p14="http://schemas.microsoft.com/office/powerpoint/2010/main" val="137183875"/>
       </p:ext>
     </p:extLst>
   </p:cSld>
@@ -5584,7 +5584,7 @@
           <p:cNvPr id="23" name="">
             <a:extLst xmlns:a="http://schemas.openxmlformats.org/drawingml/2006/main">
               <a:ext uri="{FF2B5EF4-FFF2-40B4-BE49-F238E27FC236}">
-                <a16:creationId xmlns:a16="http://schemas.microsoft.com/office/drawing/2014/main" id="{CC6CBCFD-F658-42B6-BD33-2C1849C8562C}"/>
+                <a16:creationId xmlns:a16="http://schemas.microsoft.com/office/drawing/2014/main" id="{022CE7F0-870D-40FD-9A35-5FAEA81C3C7F}"/>
               </a:ext>
             </a:extLst>
           </p:cNvPr>
@@ -5616,7 +5616,7 @@
           <p:cNvPr id="2" name="">
             <a:extLst xmlns:a="http://schemas.openxmlformats.org/drawingml/2006/main">
               <a:ext uri="{FF2B5EF4-FFF2-40B4-BE49-F238E27FC236}">
-                <a16:creationId xmlns:a16="http://schemas.microsoft.com/office/drawing/2014/main" id="{FCAB4BD4-D350-4C62-877E-403BD18E2541}"/>
+                <a16:creationId xmlns:a16="http://schemas.microsoft.com/office/drawing/2014/main" id="{D8C99EFF-DFCD-414F-A490-8CD8694AF584}"/>
               </a:ext>
             </a:extLst>
           </p:cNvPr>
@@ -5673,7 +5673,7 @@
           <p:cNvPr id="3" name="">
             <a:extLst xmlns:a="http://schemas.openxmlformats.org/drawingml/2006/main">
               <a:ext uri="{FF2B5EF4-FFF2-40B4-BE49-F238E27FC236}">
-                <a16:creationId xmlns:a16="http://schemas.microsoft.com/office/drawing/2014/main" id="{37D53D2E-B700-41B2-913F-BAEA64F8B0CF}"/>
+                <a16:creationId xmlns:a16="http://schemas.microsoft.com/office/drawing/2014/main" id="{8D753D30-1216-4E70-8F2C-F69170DE6C5D}"/>
               </a:ext>
             </a:extLst>
           </p:cNvPr>
@@ -5705,7 +5705,7 @@
           <p:cNvPr id="4" name="">
             <a:extLst xmlns:a="http://schemas.openxmlformats.org/drawingml/2006/main">
               <a:ext uri="{FF2B5EF4-FFF2-40B4-BE49-F238E27FC236}">
-                <a16:creationId xmlns:a16="http://schemas.microsoft.com/office/drawing/2014/main" id="{B79387CF-4FE1-451A-87A8-4C37C651D979}"/>
+                <a16:creationId xmlns:a16="http://schemas.microsoft.com/office/drawing/2014/main" id="{29106DFA-E37E-43BC-98D2-0A980A805673}"/>
               </a:ext>
             </a:extLst>
           </p:cNvPr>
@@ -5762,7 +5762,7 @@
           <p:cNvPr id="5" name="">
             <a:extLst xmlns:a="http://schemas.openxmlformats.org/drawingml/2006/main">
               <a:ext uri="{FF2B5EF4-FFF2-40B4-BE49-F238E27FC236}">
-                <a16:creationId xmlns:a16="http://schemas.microsoft.com/office/drawing/2014/main" id="{6B3E4AC7-95B8-4EA9-90B9-5E3CD1C5797B}"/>
+                <a16:creationId xmlns:a16="http://schemas.microsoft.com/office/drawing/2014/main" id="{E02D4837-216E-4494-8C14-B9574AEBF644}"/>
               </a:ext>
             </a:extLst>
           </p:cNvPr>
@@ -5819,7 +5819,7 @@
           <p:cNvPr id="6" name="">
             <a:extLst xmlns:a="http://schemas.openxmlformats.org/drawingml/2006/main">
               <a:ext uri="{FF2B5EF4-FFF2-40B4-BE49-F238E27FC236}">
-                <a16:creationId xmlns:a16="http://schemas.microsoft.com/office/drawing/2014/main" id="{4BEC1FF0-011A-4061-AB67-993CAD11E3FE}"/>
+                <a16:creationId xmlns:a16="http://schemas.microsoft.com/office/drawing/2014/main" id="{683E9D5A-D31A-4DAA-B5D0-B717626E0B06}"/>
               </a:ext>
             </a:extLst>
           </p:cNvPr>
@@ -5876,7 +5876,7 @@
           <p:cNvPr id="7" name="">
             <a:extLst xmlns:a="http://schemas.openxmlformats.org/drawingml/2006/main">
               <a:ext uri="{FF2B5EF4-FFF2-40B4-BE49-F238E27FC236}">
-                <a16:creationId xmlns:a16="http://schemas.microsoft.com/office/drawing/2014/main" id="{2039C93F-136D-440E-97A7-61084394A9E2}"/>
+                <a16:creationId xmlns:a16="http://schemas.microsoft.com/office/drawing/2014/main" id="{48DB37D0-7314-44AC-AE19-17584109C91A}"/>
               </a:ext>
             </a:extLst>
           </p:cNvPr>
@@ -5908,7 +5908,7 @@
           <p:cNvPr id="8" name="">
             <a:extLst xmlns:a="http://schemas.openxmlformats.org/drawingml/2006/main">
               <a:ext uri="{FF2B5EF4-FFF2-40B4-BE49-F238E27FC236}">
-                <a16:creationId xmlns:a16="http://schemas.microsoft.com/office/drawing/2014/main" id="{4C572F53-E473-4196-BCDB-D9B7772BA269}"/>
+                <a16:creationId xmlns:a16="http://schemas.microsoft.com/office/drawing/2014/main" id="{091DC80E-B4A9-42FB-B93E-DBAA66D0BB04}"/>
               </a:ext>
             </a:extLst>
           </p:cNvPr>
@@ -5965,7 +5965,7 @@
           <p:cNvPr id="9" name="">
             <a:extLst xmlns:a="http://schemas.openxmlformats.org/drawingml/2006/main">
               <a:ext uri="{FF2B5EF4-FFF2-40B4-BE49-F238E27FC236}">
-                <a16:creationId xmlns:a16="http://schemas.microsoft.com/office/drawing/2014/main" id="{295DC79A-E9F0-403C-85A9-AF8F0E916619}"/>
+                <a16:creationId xmlns:a16="http://schemas.microsoft.com/office/drawing/2014/main" id="{3B82C35E-E031-4A44-9055-2DFCF58604BA}"/>
               </a:ext>
             </a:extLst>
           </p:cNvPr>
@@ -6022,7 +6022,7 @@
           <p:cNvPr id="10" name="">
             <a:extLst xmlns:a="http://schemas.openxmlformats.org/drawingml/2006/main">
               <a:ext uri="{FF2B5EF4-FFF2-40B4-BE49-F238E27FC236}">
-                <a16:creationId xmlns:a16="http://schemas.microsoft.com/office/drawing/2014/main" id="{39D5DA87-231F-49DF-9892-125199D9A45F}"/>
+                <a16:creationId xmlns:a16="http://schemas.microsoft.com/office/drawing/2014/main" id="{832E5268-528A-4D0A-9907-D17A6EF22043}"/>
               </a:ext>
             </a:extLst>
           </p:cNvPr>
@@ -6056,7 +6056,7 @@
           <p:cNvPr id="11" name="">
             <a:extLst xmlns:a="http://schemas.openxmlformats.org/drawingml/2006/main">
               <a:ext uri="{FF2B5EF4-FFF2-40B4-BE49-F238E27FC236}">
-                <a16:creationId xmlns:a16="http://schemas.microsoft.com/office/drawing/2014/main" id="{27F42579-9A71-4333-8C22-4BFB9DBBAFED}"/>
+                <a16:creationId xmlns:a16="http://schemas.microsoft.com/office/drawing/2014/main" id="{2EBE0A11-81A7-42FB-AEC0-B4A6455BCA40}"/>
               </a:ext>
             </a:extLst>
           </p:cNvPr>
@@ -6088,7 +6088,7 @@
           <p:cNvPr id="12" name="">
             <a:extLst xmlns:a="http://schemas.openxmlformats.org/drawingml/2006/main">
               <a:ext uri="{FF2B5EF4-FFF2-40B4-BE49-F238E27FC236}">
-                <a16:creationId xmlns:a16="http://schemas.microsoft.com/office/drawing/2014/main" id="{D36B7478-3E88-41E9-AC0A-D111718912A8}"/>
+                <a16:creationId xmlns:a16="http://schemas.microsoft.com/office/drawing/2014/main" id="{5E3CCB6B-295F-4CD4-B4E2-BC228C8560AF}"/>
               </a:ext>
             </a:extLst>
           </p:cNvPr>
@@ -6145,7 +6145,7 @@
           <p:cNvPr id="13" name="">
             <a:extLst xmlns:a="http://schemas.openxmlformats.org/drawingml/2006/main">
               <a:ext uri="{FF2B5EF4-FFF2-40B4-BE49-F238E27FC236}">
-                <a16:creationId xmlns:a16="http://schemas.microsoft.com/office/drawing/2014/main" id="{3D5B42AD-0591-40B5-8C74-8B58EAD275A3}"/>
+                <a16:creationId xmlns:a16="http://schemas.microsoft.com/office/drawing/2014/main" id="{E8587CD9-0B97-4A81-82BE-790433F761DD}"/>
               </a:ext>
             </a:extLst>
           </p:cNvPr>
@@ -6202,7 +6202,7 @@
           <p:cNvPr id="14" name="">
             <a:extLst xmlns:a="http://schemas.openxmlformats.org/drawingml/2006/main">
               <a:ext uri="{FF2B5EF4-FFF2-40B4-BE49-F238E27FC236}">
-                <a16:creationId xmlns:a16="http://schemas.microsoft.com/office/drawing/2014/main" id="{83A68AE4-7952-4C3D-8ED7-020F707A1A82}"/>
+                <a16:creationId xmlns:a16="http://schemas.microsoft.com/office/drawing/2014/main" id="{4377AF87-D3D9-4797-87D7-10BF53296CDF}"/>
               </a:ext>
             </a:extLst>
           </p:cNvPr>
@@ -6236,7 +6236,7 @@
           <p:cNvPr id="15" name="">
             <a:extLst xmlns:a="http://schemas.openxmlformats.org/drawingml/2006/main">
               <a:ext uri="{FF2B5EF4-FFF2-40B4-BE49-F238E27FC236}">
-                <a16:creationId xmlns:a16="http://schemas.microsoft.com/office/drawing/2014/main" id="{5C6B017A-3493-4BBF-A052-D749820B67C8}"/>
+                <a16:creationId xmlns:a16="http://schemas.microsoft.com/office/drawing/2014/main" id="{B52BCB11-3B1A-44B0-9517-E2F247153943}"/>
               </a:ext>
             </a:extLst>
           </p:cNvPr>
@@ -6268,7 +6268,7 @@
           <p:cNvPr id="16" name="">
             <a:extLst xmlns:a="http://schemas.openxmlformats.org/drawingml/2006/main">
               <a:ext uri="{FF2B5EF4-FFF2-40B4-BE49-F238E27FC236}">
-                <a16:creationId xmlns:a16="http://schemas.microsoft.com/office/drawing/2014/main" id="{6B5BD660-F76F-4EB5-A841-B98D873CFBB6}"/>
+                <a16:creationId xmlns:a16="http://schemas.microsoft.com/office/drawing/2014/main" id="{1C24069A-DCB7-4987-BD95-785CDA62E0EB}"/>
               </a:ext>
             </a:extLst>
           </p:cNvPr>
@@ -6325,7 +6325,7 @@
           <p:cNvPr id="17" name="">
             <a:extLst xmlns:a="http://schemas.openxmlformats.org/drawingml/2006/main">
               <a:ext uri="{FF2B5EF4-FFF2-40B4-BE49-F238E27FC236}">
-                <a16:creationId xmlns:a16="http://schemas.microsoft.com/office/drawing/2014/main" id="{F7B2221E-E323-4777-B5D6-701B8CAC72E4}"/>
+                <a16:creationId xmlns:a16="http://schemas.microsoft.com/office/drawing/2014/main" id="{D8D8A10A-1C24-4018-9FA2-C61B7961A919}"/>
               </a:ext>
             </a:extLst>
           </p:cNvPr>
@@ -6382,7 +6382,7 @@
           <p:cNvPr id="18" name="">
             <a:extLst xmlns:a="http://schemas.openxmlformats.org/drawingml/2006/main">
               <a:ext uri="{FF2B5EF4-FFF2-40B4-BE49-F238E27FC236}">
-                <a16:creationId xmlns:a16="http://schemas.microsoft.com/office/drawing/2014/main" id="{918F136F-8541-4EA5-AD12-02583CEBE3ED}"/>
+                <a16:creationId xmlns:a16="http://schemas.microsoft.com/office/drawing/2014/main" id="{752DFEBC-21E7-4257-9B16-969029981A86}"/>
               </a:ext>
             </a:extLst>
           </p:cNvPr>
@@ -6416,7 +6416,7 @@
           <p:cNvPr id="19" name="">
             <a:extLst xmlns:a="http://schemas.openxmlformats.org/drawingml/2006/main">
               <a:ext uri="{FF2B5EF4-FFF2-40B4-BE49-F238E27FC236}">
-                <a16:creationId xmlns:a16="http://schemas.microsoft.com/office/drawing/2014/main" id="{D0CE62D4-B4E5-4ABE-B5BD-C32508BAC3A5}"/>
+                <a16:creationId xmlns:a16="http://schemas.microsoft.com/office/drawing/2014/main" id="{AC551496-FB79-4A68-AD6B-3CC22233C10E}"/>
               </a:ext>
             </a:extLst>
           </p:cNvPr>
@@ -6448,7 +6448,7 @@
           <p:cNvPr id="20" name="">
             <a:extLst xmlns:a="http://schemas.openxmlformats.org/drawingml/2006/main">
               <a:ext uri="{FF2B5EF4-FFF2-40B4-BE49-F238E27FC236}">
-                <a16:creationId xmlns:a16="http://schemas.microsoft.com/office/drawing/2014/main" id="{10987844-7AC3-4807-B092-B9CB0BA496DC}"/>
+                <a16:creationId xmlns:a16="http://schemas.microsoft.com/office/drawing/2014/main" id="{75303055-4309-434F-8B72-5A4154584C31}"/>
               </a:ext>
             </a:extLst>
           </p:cNvPr>
@@ -6505,7 +6505,7 @@
           <p:cNvPr id="21" name="">
             <a:extLst xmlns:a="http://schemas.openxmlformats.org/drawingml/2006/main">
               <a:ext uri="{FF2B5EF4-FFF2-40B4-BE49-F238E27FC236}">
-                <a16:creationId xmlns:a16="http://schemas.microsoft.com/office/drawing/2014/main" id="{EB47ADFE-D6F7-4DB5-8F75-ADF5948A980E}"/>
+                <a16:creationId xmlns:a16="http://schemas.microsoft.com/office/drawing/2014/main" id="{30C04A46-5C29-48B0-A07D-BD4FA5A42F59}"/>
               </a:ext>
             </a:extLst>
           </p:cNvPr>
@@ -6562,7 +6562,7 @@
           <p:cNvPr id="22" name="">
             <a:extLst xmlns:a="http://schemas.openxmlformats.org/drawingml/2006/main">
               <a:ext uri="{FF2B5EF4-FFF2-40B4-BE49-F238E27FC236}">
-                <a16:creationId xmlns:a16="http://schemas.microsoft.com/office/drawing/2014/main" id="{5B40587C-17CE-4D38-8860-34D1A7F4A3FB}"/>
+                <a16:creationId xmlns:a16="http://schemas.microsoft.com/office/drawing/2014/main" id="{3F717909-B959-4F52-A53E-7651E38BC34A}"/>
               </a:ext>
             </a:extLst>
           </p:cNvPr>
@@ -6617,7 +6617,7 @@
     </p:spTree>
     <p:extLst>
       <p:ext uri="{BB962C8B-B14F-4D97-AF65-F5344CB8AC3E}">
-        <p14:creationId xmlns:p14="http://schemas.microsoft.com/office/powerpoint/2010/main" val="1853359152"/>
+        <p14:creationId xmlns:p14="http://schemas.microsoft.com/office/powerpoint/2010/main" val="61024950"/>
       </p:ext>
     </p:extLst>
   </p:cSld>
@@ -6818,7 +6818,7 @@
           <p:cNvPr id="16" name="">
             <a:extLst xmlns:a="http://schemas.openxmlformats.org/drawingml/2006/main">
               <a:ext uri="{FF2B5EF4-FFF2-40B4-BE49-F238E27FC236}">
-                <a16:creationId xmlns:a16="http://schemas.microsoft.com/office/drawing/2014/main" id="{3666B02B-E9A8-47F7-BB35-3D00F1AF5D56}"/>
+                <a16:creationId xmlns:a16="http://schemas.microsoft.com/office/drawing/2014/main" id="{C9E45A46-4698-4A55-9479-16B3E862A308}"/>
               </a:ext>
             </a:extLst>
           </p:cNvPr>
@@ -6850,7 +6850,7 @@
           <p:cNvPr id="2" name="">
             <a:extLst xmlns:a="http://schemas.openxmlformats.org/drawingml/2006/main">
               <a:ext uri="{FF2B5EF4-FFF2-40B4-BE49-F238E27FC236}">
-                <a16:creationId xmlns:a16="http://schemas.microsoft.com/office/drawing/2014/main" id="{CD0DCDC7-D3F4-48F2-A748-6731BAC26A77}"/>
+                <a16:creationId xmlns:a16="http://schemas.microsoft.com/office/drawing/2014/main" id="{50684B55-744B-4F4A-86BF-96F777BD58FE}"/>
               </a:ext>
             </a:extLst>
           </p:cNvPr>
@@ -6907,7 +6907,7 @@
           <p:cNvPr id="3" name="">
             <a:extLst xmlns:a="http://schemas.openxmlformats.org/drawingml/2006/main">
               <a:ext uri="{FF2B5EF4-FFF2-40B4-BE49-F238E27FC236}">
-                <a16:creationId xmlns:a16="http://schemas.microsoft.com/office/drawing/2014/main" id="{E80F04E6-4800-489F-A60C-BD270BDEC82F}"/>
+                <a16:creationId xmlns:a16="http://schemas.microsoft.com/office/drawing/2014/main" id="{DE585D8F-04EB-4652-9D46-F13CF3184DC5}"/>
               </a:ext>
             </a:extLst>
           </p:cNvPr>
@@ -6939,7 +6939,7 @@
           <p:cNvPr id="4" name="">
             <a:extLst xmlns:a="http://schemas.openxmlformats.org/drawingml/2006/main">
               <a:ext uri="{FF2B5EF4-FFF2-40B4-BE49-F238E27FC236}">
-                <a16:creationId xmlns:a16="http://schemas.microsoft.com/office/drawing/2014/main" id="{C3AF2DD3-FF5A-48EB-B68C-A5C5366E285A}"/>
+                <a16:creationId xmlns:a16="http://schemas.microsoft.com/office/drawing/2014/main" id="{AE033150-58AF-4E46-A24D-D81952C1A422}"/>
               </a:ext>
             </a:extLst>
           </p:cNvPr>
@@ -6996,7 +6996,7 @@
           <p:cNvPr id="5" name="">
             <a:extLst xmlns:a="http://schemas.openxmlformats.org/drawingml/2006/main">
               <a:ext uri="{FF2B5EF4-FFF2-40B4-BE49-F238E27FC236}">
-                <a16:creationId xmlns:a16="http://schemas.microsoft.com/office/drawing/2014/main" id="{3CBEA50C-4B9B-4576-9FC2-017238156B1F}"/>
+                <a16:creationId xmlns:a16="http://schemas.microsoft.com/office/drawing/2014/main" id="{76D69E28-18E1-478F-9D39-3EB3F05B0393}"/>
               </a:ext>
             </a:extLst>
           </p:cNvPr>
@@ -7053,7 +7053,7 @@
           <p:cNvPr id="6" name="">
             <a:extLst xmlns:a="http://schemas.openxmlformats.org/drawingml/2006/main">
               <a:ext uri="{FF2B5EF4-FFF2-40B4-BE49-F238E27FC236}">
-                <a16:creationId xmlns:a16="http://schemas.microsoft.com/office/drawing/2014/main" id="{B4077CAA-A426-4153-A35E-14733568218B}"/>
+                <a16:creationId xmlns:a16="http://schemas.microsoft.com/office/drawing/2014/main" id="{5C0BFC95-3F5C-4CC3-A765-DB34A6802B74}"/>
               </a:ext>
             </a:extLst>
           </p:cNvPr>
@@ -7110,7 +7110,7 @@
           <p:cNvPr id="7" name="">
             <a:extLst xmlns:a="http://schemas.openxmlformats.org/drawingml/2006/main">
               <a:ext uri="{FF2B5EF4-FFF2-40B4-BE49-F238E27FC236}">
-                <a16:creationId xmlns:a16="http://schemas.microsoft.com/office/drawing/2014/main" id="{849FB88F-0BEA-4B84-8FDD-134BEEEC3CD7}"/>
+                <a16:creationId xmlns:a16="http://schemas.microsoft.com/office/drawing/2014/main" id="{E7157550-03D4-42CC-9F49-3B045768E4A2}"/>
               </a:ext>
             </a:extLst>
           </p:cNvPr>
@@ -7142,7 +7142,7 @@
           <p:cNvPr id="8" name="">
             <a:extLst xmlns:a="http://schemas.openxmlformats.org/drawingml/2006/main">
               <a:ext uri="{FF2B5EF4-FFF2-40B4-BE49-F238E27FC236}">
-                <a16:creationId xmlns:a16="http://schemas.microsoft.com/office/drawing/2014/main" id="{4D711FB8-1693-4A2D-86CF-CE3B8B64449F}"/>
+                <a16:creationId xmlns:a16="http://schemas.microsoft.com/office/drawing/2014/main" id="{563C91F2-C53D-46A6-A966-1E7789911670}"/>
               </a:ext>
             </a:extLst>
           </p:cNvPr>
@@ -7199,7 +7199,7 @@
           <p:cNvPr id="9" name="">
             <a:extLst xmlns:a="http://schemas.openxmlformats.org/drawingml/2006/main">
               <a:ext uri="{FF2B5EF4-FFF2-40B4-BE49-F238E27FC236}">
-                <a16:creationId xmlns:a16="http://schemas.microsoft.com/office/drawing/2014/main" id="{505F2558-D3A7-42C2-9380-4D5FD653DB2D}"/>
+                <a16:creationId xmlns:a16="http://schemas.microsoft.com/office/drawing/2014/main" id="{172A7EF6-EF59-43A8-9559-290B67A0CAC1}"/>
               </a:ext>
             </a:extLst>
           </p:cNvPr>
@@ -7256,7 +7256,7 @@
           <p:cNvPr id="10" name="">
             <a:extLst xmlns:a="http://schemas.openxmlformats.org/drawingml/2006/main">
               <a:ext uri="{FF2B5EF4-FFF2-40B4-BE49-F238E27FC236}">
-                <a16:creationId xmlns:a16="http://schemas.microsoft.com/office/drawing/2014/main" id="{26208B09-5B62-4719-B7D7-5445F8A78EEE}"/>
+                <a16:creationId xmlns:a16="http://schemas.microsoft.com/office/drawing/2014/main" id="{A217C6B8-9D53-4BB4-93C4-37F675F08739}"/>
               </a:ext>
             </a:extLst>
           </p:cNvPr>
@@ -7313,7 +7313,7 @@
           <p:cNvPr id="11" name="">
             <a:extLst xmlns:a="http://schemas.openxmlformats.org/drawingml/2006/main">
               <a:ext uri="{FF2B5EF4-FFF2-40B4-BE49-F238E27FC236}">
-                <a16:creationId xmlns:a16="http://schemas.microsoft.com/office/drawing/2014/main" id="{AB0F1B36-CA59-4103-9551-1D3172B67F83}"/>
+                <a16:creationId xmlns:a16="http://schemas.microsoft.com/office/drawing/2014/main" id="{91571C98-41F6-49B4-ABB6-DEA641AC542F}"/>
               </a:ext>
             </a:extLst>
           </p:cNvPr>
@@ -7345,7 +7345,7 @@
           <p:cNvPr id="12" name="">
             <a:extLst xmlns:a="http://schemas.openxmlformats.org/drawingml/2006/main">
               <a:ext uri="{FF2B5EF4-FFF2-40B4-BE49-F238E27FC236}">
-                <a16:creationId xmlns:a16="http://schemas.microsoft.com/office/drawing/2014/main" id="{F32A01F3-D2AD-40A2-B871-2BB892669969}"/>
+                <a16:creationId xmlns:a16="http://schemas.microsoft.com/office/drawing/2014/main" id="{545230ED-0DC3-4707-ADAB-D86413242195}"/>
               </a:ext>
             </a:extLst>
           </p:cNvPr>
@@ -7402,7 +7402,7 @@
           <p:cNvPr id="13" name="">
             <a:extLst xmlns:a="http://schemas.openxmlformats.org/drawingml/2006/main">
               <a:ext uri="{FF2B5EF4-FFF2-40B4-BE49-F238E27FC236}">
-                <a16:creationId xmlns:a16="http://schemas.microsoft.com/office/drawing/2014/main" id="{4FE1D41B-7D92-465A-80DC-0CDD00091A29}"/>
+                <a16:creationId xmlns:a16="http://schemas.microsoft.com/office/drawing/2014/main" id="{C9588C90-601A-45BA-9552-29BE8ED89EF9}"/>
               </a:ext>
             </a:extLst>
           </p:cNvPr>
@@ -7459,7 +7459,7 @@
           <p:cNvPr id="14" name="">
             <a:extLst xmlns:a="http://schemas.openxmlformats.org/drawingml/2006/main">
               <a:ext uri="{FF2B5EF4-FFF2-40B4-BE49-F238E27FC236}">
-                <a16:creationId xmlns:a16="http://schemas.microsoft.com/office/drawing/2014/main" id="{40E8CA90-53A8-4605-A65E-3A9750E1FE25}"/>
+                <a16:creationId xmlns:a16="http://schemas.microsoft.com/office/drawing/2014/main" id="{BA79CFAB-0888-41D8-AC62-D40659406576}"/>
               </a:ext>
             </a:extLst>
           </p:cNvPr>
@@ -7516,7 +7516,7 @@
           <p:cNvPr id="15" name="">
             <a:extLst xmlns:a="http://schemas.openxmlformats.org/drawingml/2006/main">
               <a:ext uri="{FF2B5EF4-FFF2-40B4-BE49-F238E27FC236}">
-                <a16:creationId xmlns:a16="http://schemas.microsoft.com/office/drawing/2014/main" id="{5BB12068-0538-435E-8224-9521773DCE61}"/>
+                <a16:creationId xmlns:a16="http://schemas.microsoft.com/office/drawing/2014/main" id="{E6857766-1750-47BB-A399-32737F3AF592}"/>
               </a:ext>
             </a:extLst>
           </p:cNvPr>
@@ -7571,7 +7571,7 @@
     </p:spTree>
     <p:extLst>
       <p:ext uri="{BB962C8B-B14F-4D97-AF65-F5344CB8AC3E}">
-        <p14:creationId xmlns:p14="http://schemas.microsoft.com/office/powerpoint/2010/main" val="1948976580"/>
+        <p14:creationId xmlns:p14="http://schemas.microsoft.com/office/powerpoint/2010/main" val="472145006"/>
       </p:ext>
     </p:extLst>
   </p:cSld>
@@ -7772,7 +7772,7 @@
           <p:cNvPr id="23" name="">
             <a:extLst xmlns:a="http://schemas.openxmlformats.org/drawingml/2006/main">
               <a:ext uri="{FF2B5EF4-FFF2-40B4-BE49-F238E27FC236}">
-                <a16:creationId xmlns:a16="http://schemas.microsoft.com/office/drawing/2014/main" id="{3F769A82-6256-4D36-A8AA-0B010A26ABD7}"/>
+                <a16:creationId xmlns:a16="http://schemas.microsoft.com/office/drawing/2014/main" id="{193EA3E9-3818-4B3C-A911-50C8A2B6ED6A}"/>
               </a:ext>
             </a:extLst>
           </p:cNvPr>
@@ -7804,7 +7804,7 @@
           <p:cNvPr id="2" name="">
             <a:extLst xmlns:a="http://schemas.openxmlformats.org/drawingml/2006/main">
               <a:ext uri="{FF2B5EF4-FFF2-40B4-BE49-F238E27FC236}">
-                <a16:creationId xmlns:a16="http://schemas.microsoft.com/office/drawing/2014/main" id="{19AE298F-946D-4E1B-B855-5E42D3124B90}"/>
+                <a16:creationId xmlns:a16="http://schemas.microsoft.com/office/drawing/2014/main" id="{8AF69C26-4106-42D8-905A-ED2288E39EF4}"/>
               </a:ext>
             </a:extLst>
           </p:cNvPr>
@@ -7861,7 +7861,7 @@
           <p:cNvPr id="3" name="">
             <a:extLst xmlns:a="http://schemas.openxmlformats.org/drawingml/2006/main">
               <a:ext uri="{FF2B5EF4-FFF2-40B4-BE49-F238E27FC236}">
-                <a16:creationId xmlns:a16="http://schemas.microsoft.com/office/drawing/2014/main" id="{8C41EA66-F7AA-4232-8501-F9F98A313191}"/>
+                <a16:creationId xmlns:a16="http://schemas.microsoft.com/office/drawing/2014/main" id="{FB49BA91-B460-4B41-9AD4-C68BCEE45325}"/>
               </a:ext>
             </a:extLst>
           </p:cNvPr>
@@ -7893,7 +7893,7 @@
           <p:cNvPr id="4" name="">
             <a:extLst xmlns:a="http://schemas.openxmlformats.org/drawingml/2006/main">
               <a:ext uri="{FF2B5EF4-FFF2-40B4-BE49-F238E27FC236}">
-                <a16:creationId xmlns:a16="http://schemas.microsoft.com/office/drawing/2014/main" id="{2746C22D-3B42-4DDC-8D80-32B368E639B6}"/>
+                <a16:creationId xmlns:a16="http://schemas.microsoft.com/office/drawing/2014/main" id="{A12DEDB6-6293-4D71-92DC-DAC7B9E2D655}"/>
               </a:ext>
             </a:extLst>
           </p:cNvPr>
@@ -7950,7 +7950,7 @@
           <p:cNvPr id="5" name="">
             <a:extLst xmlns:a="http://schemas.openxmlformats.org/drawingml/2006/main">
               <a:ext uri="{FF2B5EF4-FFF2-40B4-BE49-F238E27FC236}">
-                <a16:creationId xmlns:a16="http://schemas.microsoft.com/office/drawing/2014/main" id="{1C1FF2DF-A545-40AA-8554-42FDA9B8E949}"/>
+                <a16:creationId xmlns:a16="http://schemas.microsoft.com/office/drawing/2014/main" id="{88F1FFCA-E328-4FAB-9BF5-92DB309CE7BC}"/>
               </a:ext>
             </a:extLst>
           </p:cNvPr>
@@ -8007,7 +8007,7 @@
           <p:cNvPr id="6" name="">
             <a:extLst xmlns:a="http://schemas.openxmlformats.org/drawingml/2006/main">
               <a:ext uri="{FF2B5EF4-FFF2-40B4-BE49-F238E27FC236}">
-                <a16:creationId xmlns:a16="http://schemas.microsoft.com/office/drawing/2014/main" id="{79149C6B-048C-4903-9747-7D7AA814FBBA}"/>
+                <a16:creationId xmlns:a16="http://schemas.microsoft.com/office/drawing/2014/main" id="{397669C1-EBAB-402A-8B9A-DC4C59C61D8B}"/>
               </a:ext>
             </a:extLst>
           </p:cNvPr>
@@ -8064,7 +8064,7 @@
           <p:cNvPr id="7" name="">
             <a:extLst xmlns:a="http://schemas.openxmlformats.org/drawingml/2006/main">
               <a:ext uri="{FF2B5EF4-FFF2-40B4-BE49-F238E27FC236}">
-                <a16:creationId xmlns:a16="http://schemas.microsoft.com/office/drawing/2014/main" id="{B6142748-0DEC-4631-A6AC-569CC9964F39}"/>
+                <a16:creationId xmlns:a16="http://schemas.microsoft.com/office/drawing/2014/main" id="{A60EEFF1-ECFF-4F97-BFD8-440E79376360}"/>
               </a:ext>
             </a:extLst>
           </p:cNvPr>
@@ -8096,7 +8096,7 @@
           <p:cNvPr id="8" name="">
             <a:extLst xmlns:a="http://schemas.openxmlformats.org/drawingml/2006/main">
               <a:ext uri="{FF2B5EF4-FFF2-40B4-BE49-F238E27FC236}">
-                <a16:creationId xmlns:a16="http://schemas.microsoft.com/office/drawing/2014/main" id="{CCD3DEDA-C0D7-41DD-A36F-9946D39E4404}"/>
+                <a16:creationId xmlns:a16="http://schemas.microsoft.com/office/drawing/2014/main" id="{EA6605E0-614B-4156-A798-3EB60191C128}"/>
               </a:ext>
             </a:extLst>
           </p:cNvPr>
@@ -8153,7 +8153,7 @@
           <p:cNvPr id="9" name="">
             <a:extLst xmlns:a="http://schemas.openxmlformats.org/drawingml/2006/main">
               <a:ext uri="{FF2B5EF4-FFF2-40B4-BE49-F238E27FC236}">
-                <a16:creationId xmlns:a16="http://schemas.microsoft.com/office/drawing/2014/main" id="{66871CD3-6C61-4AFE-BCBC-ECB1B11C2C7D}"/>
+                <a16:creationId xmlns:a16="http://schemas.microsoft.com/office/drawing/2014/main" id="{295FF1AB-5F4C-4E2F-BE7D-D0F6863EAC6A}"/>
               </a:ext>
             </a:extLst>
           </p:cNvPr>
@@ -8210,19 +8210,19 @@
           <p:cNvPr id="10" name="">
             <a:extLst xmlns:a="http://schemas.openxmlformats.org/drawingml/2006/main">
               <a:ext uri="{FF2B5EF4-FFF2-40B4-BE49-F238E27FC236}">
-                <a16:creationId xmlns:a16="http://schemas.microsoft.com/office/drawing/2014/main" id="{B3BA9E0A-D17B-4B39-B250-1E61E2FB8F8B}"/>
-              </a:ext>
-            </a:extLst>
-          </p:cNvPr>
-          <p:cNvSpPr>
-            <a:spLocks xmlns:a="http://schemas.openxmlformats.org/drawingml/2006/main" noGrp="1"/>
-          </p:cNvSpPr>
-          <p:nvPr/>
-        </p:nvSpPr>
-        <p:spPr>
-          <a:xfrm xmlns:a="http://schemas.openxmlformats.org/drawingml/2006/main">
-            <a:off x="914400" y="1257300"/>
-            <a:ext cx="10363200" cy="781050"/>
+                <a16:creationId xmlns:a16="http://schemas.microsoft.com/office/drawing/2014/main" id="{9BC64481-6FF0-42A5-808B-4CC084ED613C}"/>
+              </a:ext>
+            </a:extLst>
+          </p:cNvPr>
+          <p:cNvSpPr>
+            <a:spLocks xmlns:a="http://schemas.openxmlformats.org/drawingml/2006/main" noGrp="1"/>
+          </p:cNvSpPr>
+          <p:nvPr/>
+        </p:nvSpPr>
+        <p:spPr>
+          <a:xfrm xmlns:a="http://schemas.openxmlformats.org/drawingml/2006/main">
+            <a:off x="857250" y="1219200"/>
+            <a:ext cx="10477500" cy="742950"/>
           </a:xfrm>
           <a:prstGeom xmlns:a="http://schemas.openxmlformats.org/drawingml/2006/main" prst="rect">
             <a:avLst/>
@@ -8239,7 +8239,7 @@
           <a:lstStyle xmlns:a="http://schemas.openxmlformats.org/drawingml/2006/main"/>
           <a:p xmlns:a="http://schemas.openxmlformats.org/drawingml/2006/main">
             <a:pPr algn="ctr">
-              <a:defRPr sz="2175" b="1">
+              <a:defRPr sz="2100" b="1">
                 <a:solidFill>
                   <a:srgbClr val="17253A"/>
                 </a:solidFill>
@@ -8249,7 +8249,7 @@
               </a:defRPr>
             </a:pPr>
             <a:r>
-              <a:rPr sz="2175" b="1">
+              <a:rPr sz="2100" b="1">
                 <a:solidFill>
                   <a:srgbClr val="17253A"/>
                 </a:solidFill>
@@ -8267,28 +8267,30 @@
           <p:cNvPr id="11" name="">
             <a:extLst xmlns:a="http://schemas.openxmlformats.org/drawingml/2006/main">
               <a:ext uri="{FF2B5EF4-FFF2-40B4-BE49-F238E27FC236}">
-                <a16:creationId xmlns:a16="http://schemas.microsoft.com/office/drawing/2014/main" id="{867BC558-BEA6-4E1A-B59D-7CF13C402DCE}"/>
-              </a:ext>
-            </a:extLst>
-          </p:cNvPr>
-          <p:cNvSpPr>
-            <a:spLocks xmlns:a="http://schemas.openxmlformats.org/drawingml/2006/main" noGrp="1"/>
-          </p:cNvSpPr>
-          <p:nvPr/>
-        </p:nvSpPr>
-        <p:spPr>
-          <a:xfrm xmlns:a="http://schemas.openxmlformats.org/drawingml/2006/main">
-            <a:off x="1000125" y="2247900"/>
-            <a:ext cx="476250" cy="476250"/>
-          </a:xfrm>
-          <a:prstGeom xmlns:a="http://schemas.openxmlformats.org/drawingml/2006/main" prst="ellipse">
+                <a16:creationId xmlns:a16="http://schemas.microsoft.com/office/drawing/2014/main" id="{F04767D4-FFE0-46EC-B99C-CB5CE9401B7A}"/>
+              </a:ext>
+            </a:extLst>
+          </p:cNvPr>
+          <p:cNvSpPr>
+            <a:spLocks xmlns:a="http://schemas.openxmlformats.org/drawingml/2006/main" noGrp="1"/>
+          </p:cNvSpPr>
+          <p:nvPr/>
+        </p:nvSpPr>
+        <p:spPr>
+          <a:xfrm xmlns:a="http://schemas.openxmlformats.org/drawingml/2006/main">
+            <a:off x="971550" y="2124075"/>
+            <a:ext cx="38100" cy="3524250"/>
+          </a:xfrm>
+          <a:prstGeom xmlns:a="http://schemas.openxmlformats.org/drawingml/2006/main" prst="rect">
             <a:avLst/>
           </a:prstGeom>
           <a:solidFill xmlns:a="http://schemas.openxmlformats.org/drawingml/2006/main">
-            <a:srgbClr val="18324A"/>
+            <a:srgbClr val="2C6E73"/>
           </a:solidFill>
           <a:ln xmlns:a="http://schemas.openxmlformats.org/drawingml/2006/main" w="0">
-            <a:noFill/>
+            <a:solidFill>
+              <a:srgbClr val="2C6E73"/>
+            </a:solidFill>
           </a:ln>
         </p:spPr>
       </p:sp>
@@ -8297,19 +8299,19 @@
           <p:cNvPr id="12" name="">
             <a:extLst xmlns:a="http://schemas.openxmlformats.org/drawingml/2006/main">
               <a:ext uri="{FF2B5EF4-FFF2-40B4-BE49-F238E27FC236}">
-                <a16:creationId xmlns:a16="http://schemas.microsoft.com/office/drawing/2014/main" id="{585753CD-D3EB-4D63-B3FC-236B7F10BB7C}"/>
-              </a:ext>
-            </a:extLst>
-          </p:cNvPr>
-          <p:cNvSpPr>
-            <a:spLocks xmlns:a="http://schemas.openxmlformats.org/drawingml/2006/main" noGrp="1"/>
-          </p:cNvSpPr>
-          <p:nvPr/>
-        </p:nvSpPr>
-        <p:spPr>
-          <a:xfrm xmlns:a="http://schemas.openxmlformats.org/drawingml/2006/main">
-            <a:off x="1000125" y="2276475"/>
-            <a:ext cx="476250" cy="419100"/>
+                <a16:creationId xmlns:a16="http://schemas.microsoft.com/office/drawing/2014/main" id="{59698E8D-444C-40D8-988A-D2F305F2C000}"/>
+              </a:ext>
+            </a:extLst>
+          </p:cNvPr>
+          <p:cNvSpPr>
+            <a:spLocks xmlns:a="http://schemas.openxmlformats.org/drawingml/2006/main" noGrp="1"/>
+          </p:cNvSpPr>
+          <p:nvPr/>
+        </p:nvSpPr>
+        <p:spPr>
+          <a:xfrm xmlns:a="http://schemas.openxmlformats.org/drawingml/2006/main">
+            <a:off x="1162050" y="2200275"/>
+            <a:ext cx="400050" cy="400050"/>
           </a:xfrm>
           <a:prstGeom xmlns:a="http://schemas.openxmlformats.org/drawingml/2006/main" prst="rect">
             <a:avLst/>
@@ -8326,9 +8328,9 @@
           <a:lstStyle xmlns:a="http://schemas.openxmlformats.org/drawingml/2006/main"/>
           <a:p xmlns:a="http://schemas.openxmlformats.org/drawingml/2006/main">
             <a:pPr algn="ctr">
-              <a:defRPr sz="1350" b="1">
-                <a:solidFill>
-                  <a:srgbClr val="FFFFFF"/>
+              <a:defRPr sz="1125" b="1">
+                <a:solidFill>
+                  <a:srgbClr val="2C6E73"/>
                 </a:solidFill>
                 <a:latin typeface="Arial"/>
                 <a:ea typeface="Arial"/>
@@ -8336,9 +8338,9 @@
               </a:defRPr>
             </a:pPr>
             <a:r>
-              <a:rPr sz="1350" b="1">
-                <a:solidFill>
-                  <a:srgbClr val="FFFFFF"/>
+              <a:rPr sz="1125" b="1">
+                <a:solidFill>
+                  <a:srgbClr val="2C6E73"/>
                 </a:solidFill>
                 <a:latin typeface="Arial"/>
                 <a:ea typeface="Arial"/>
@@ -8354,19 +8356,19 @@
           <p:cNvPr id="13" name="">
             <a:extLst xmlns:a="http://schemas.openxmlformats.org/drawingml/2006/main">
               <a:ext uri="{FF2B5EF4-FFF2-40B4-BE49-F238E27FC236}">
-                <a16:creationId xmlns:a16="http://schemas.microsoft.com/office/drawing/2014/main" id="{E6888C8F-DF75-4EC9-92DC-6FAEC8A9FB21}"/>
-              </a:ext>
-            </a:extLst>
-          </p:cNvPr>
-          <p:cNvSpPr>
-            <a:spLocks xmlns:a="http://schemas.openxmlformats.org/drawingml/2006/main" noGrp="1"/>
-          </p:cNvSpPr>
-          <p:nvPr/>
-        </p:nvSpPr>
-        <p:spPr>
-          <a:xfrm xmlns:a="http://schemas.openxmlformats.org/drawingml/2006/main">
-            <a:off x="1714500" y="2181225"/>
-            <a:ext cx="9429750" cy="609600"/>
+                <a16:creationId xmlns:a16="http://schemas.microsoft.com/office/drawing/2014/main" id="{143E4262-CA43-41BF-9EEC-71172D2C257C}"/>
+              </a:ext>
+            </a:extLst>
+          </p:cNvPr>
+          <p:cNvSpPr>
+            <a:spLocks xmlns:a="http://schemas.openxmlformats.org/drawingml/2006/main" noGrp="1"/>
+          </p:cNvSpPr>
+          <p:nvPr/>
+        </p:nvSpPr>
+        <p:spPr>
+          <a:xfrm xmlns:a="http://schemas.openxmlformats.org/drawingml/2006/main">
+            <a:off x="1714500" y="2114550"/>
+            <a:ext cx="9525000" cy="809625"/>
           </a:xfrm>
           <a:prstGeom xmlns:a="http://schemas.openxmlformats.org/drawingml/2006/main" prst="rect">
             <a:avLst/>
@@ -8383,7 +8385,7 @@
           <a:lstStyle xmlns:a="http://schemas.openxmlformats.org/drawingml/2006/main"/>
           <a:p xmlns:a="http://schemas.openxmlformats.org/drawingml/2006/main">
             <a:pPr algn="l">
-              <a:defRPr sz="1500" b="0">
+              <a:defRPr sz="1725" b="0">
                 <a:solidFill>
                   <a:srgbClr val="17253A"/>
                 </a:solidFill>
@@ -8393,7 +8395,7 @@
               </a:defRPr>
             </a:pPr>
             <a:r>
-              <a:rPr sz="1500" b="0">
+              <a:rPr sz="1725" b="0">
                 <a:solidFill>
                   <a:srgbClr val="17253A"/>
                 </a:solidFill>
@@ -8401,7 +8403,7 @@
                 <a:ea typeface="Arial"/>
                 <a:cs typeface="Arial"/>
               </a:rPr>
-              <a:t>Identify the structure: State whether the task concerns factors or multiples.</a:t>
+              <a:t>97: test primes up to √97; none divide exactly → prime</a:t>
             </a:r>
           </a:p>
         </p:txBody>
@@ -8411,28 +8413,30 @@
           <p:cNvPr id="14" name="">
             <a:extLst xmlns:a="http://schemas.openxmlformats.org/drawingml/2006/main">
               <a:ext uri="{FF2B5EF4-FFF2-40B4-BE49-F238E27FC236}">
-                <a16:creationId xmlns:a16="http://schemas.microsoft.com/office/drawing/2014/main" id="{025C6ACB-594F-4F2D-AF95-22B7C2830F39}"/>
-              </a:ext>
-            </a:extLst>
-          </p:cNvPr>
-          <p:cNvSpPr>
-            <a:spLocks xmlns:a="http://schemas.openxmlformats.org/drawingml/2006/main" noGrp="1"/>
-          </p:cNvSpPr>
-          <p:nvPr/>
-        </p:nvSpPr>
-        <p:spPr>
-          <a:xfrm xmlns:a="http://schemas.openxmlformats.org/drawingml/2006/main">
-            <a:off x="1000125" y="2990850"/>
-            <a:ext cx="476250" cy="476250"/>
-          </a:xfrm>
-          <a:prstGeom xmlns:a="http://schemas.openxmlformats.org/drawingml/2006/main" prst="ellipse">
+                <a16:creationId xmlns:a16="http://schemas.microsoft.com/office/drawing/2014/main" id="{CACAC6EB-3758-479E-B71D-C8E1DEB0AAA1}"/>
+              </a:ext>
+            </a:extLst>
+          </p:cNvPr>
+          <p:cNvSpPr>
+            <a:spLocks xmlns:a="http://schemas.openxmlformats.org/drawingml/2006/main" noGrp="1"/>
+          </p:cNvSpPr>
+          <p:nvPr/>
+        </p:nvSpPr>
+        <p:spPr>
+          <a:xfrm xmlns:a="http://schemas.openxmlformats.org/drawingml/2006/main">
+            <a:off x="1714500" y="2943225"/>
+            <a:ext cx="9334500" cy="9525"/>
+          </a:xfrm>
+          <a:prstGeom xmlns:a="http://schemas.openxmlformats.org/drawingml/2006/main" prst="rect">
             <a:avLst/>
           </a:prstGeom>
           <a:solidFill xmlns:a="http://schemas.openxmlformats.org/drawingml/2006/main">
-            <a:srgbClr val="2C6E73"/>
+            <a:srgbClr val="D9E0E6"/>
           </a:solidFill>
           <a:ln xmlns:a="http://schemas.openxmlformats.org/drawingml/2006/main" w="0">
-            <a:noFill/>
+            <a:solidFill>
+              <a:srgbClr val="D9E0E6"/>
+            </a:solidFill>
           </a:ln>
         </p:spPr>
       </p:sp>
@@ -8441,19 +8445,19 @@
           <p:cNvPr id="15" name="">
             <a:extLst xmlns:a="http://schemas.openxmlformats.org/drawingml/2006/main">
               <a:ext uri="{FF2B5EF4-FFF2-40B4-BE49-F238E27FC236}">
-                <a16:creationId xmlns:a16="http://schemas.microsoft.com/office/drawing/2014/main" id="{3070DDC2-FBD5-425E-AA46-1087F67FA9CE}"/>
-              </a:ext>
-            </a:extLst>
-          </p:cNvPr>
-          <p:cNvSpPr>
-            <a:spLocks xmlns:a="http://schemas.openxmlformats.org/drawingml/2006/main" noGrp="1"/>
-          </p:cNvSpPr>
-          <p:nvPr/>
-        </p:nvSpPr>
-        <p:spPr>
-          <a:xfrm xmlns:a="http://schemas.openxmlformats.org/drawingml/2006/main">
-            <a:off x="1000125" y="3019425"/>
-            <a:ext cx="476250" cy="419100"/>
+                <a16:creationId xmlns:a16="http://schemas.microsoft.com/office/drawing/2014/main" id="{38C390F0-A454-409C-8023-C5BD39B0B902}"/>
+              </a:ext>
+            </a:extLst>
+          </p:cNvPr>
+          <p:cNvSpPr>
+            <a:spLocks xmlns:a="http://schemas.openxmlformats.org/drawingml/2006/main" noGrp="1"/>
+          </p:cNvSpPr>
+          <p:nvPr/>
+        </p:nvSpPr>
+        <p:spPr>
+          <a:xfrm xmlns:a="http://schemas.openxmlformats.org/drawingml/2006/main">
+            <a:off x="1162050" y="3076575"/>
+            <a:ext cx="400050" cy="400050"/>
           </a:xfrm>
           <a:prstGeom xmlns:a="http://schemas.openxmlformats.org/drawingml/2006/main" prst="rect">
             <a:avLst/>
@@ -8470,9 +8474,9 @@
           <a:lstStyle xmlns:a="http://schemas.openxmlformats.org/drawingml/2006/main"/>
           <a:p xmlns:a="http://schemas.openxmlformats.org/drawingml/2006/main">
             <a:pPr algn="ctr">
-              <a:defRPr sz="1350" b="1">
-                <a:solidFill>
-                  <a:srgbClr val="FFFFFF"/>
+              <a:defRPr sz="1125" b="1">
+                <a:solidFill>
+                  <a:srgbClr val="2C6E73"/>
                 </a:solidFill>
                 <a:latin typeface="Arial"/>
                 <a:ea typeface="Arial"/>
@@ -8480,9 +8484,9 @@
               </a:defRPr>
             </a:pPr>
             <a:r>
-              <a:rPr sz="1350" b="1">
-                <a:solidFill>
-                  <a:srgbClr val="FFFFFF"/>
+              <a:rPr sz="1125" b="1">
+                <a:solidFill>
+                  <a:srgbClr val="2C6E73"/>
                 </a:solidFill>
                 <a:latin typeface="Arial"/>
                 <a:ea typeface="Arial"/>
@@ -8498,19 +8502,19 @@
           <p:cNvPr id="16" name="">
             <a:extLst xmlns:a="http://schemas.openxmlformats.org/drawingml/2006/main">
               <a:ext uri="{FF2B5EF4-FFF2-40B4-BE49-F238E27FC236}">
-                <a16:creationId xmlns:a16="http://schemas.microsoft.com/office/drawing/2014/main" id="{4E10C70A-A2AE-4A82-B7DE-78BC17864974}"/>
-              </a:ext>
-            </a:extLst>
-          </p:cNvPr>
-          <p:cNvSpPr>
-            <a:spLocks xmlns:a="http://schemas.openxmlformats.org/drawingml/2006/main" noGrp="1"/>
-          </p:cNvSpPr>
-          <p:nvPr/>
-        </p:nvSpPr>
-        <p:spPr>
-          <a:xfrm xmlns:a="http://schemas.openxmlformats.org/drawingml/2006/main">
-            <a:off x="1714500" y="2924175"/>
-            <a:ext cx="9429750" cy="609600"/>
+                <a16:creationId xmlns:a16="http://schemas.microsoft.com/office/drawing/2014/main" id="{DCC21780-2275-43A3-A3F9-1890AB88F496}"/>
+              </a:ext>
+            </a:extLst>
+          </p:cNvPr>
+          <p:cNvSpPr>
+            <a:spLocks xmlns:a="http://schemas.openxmlformats.org/drawingml/2006/main" noGrp="1"/>
+          </p:cNvSpPr>
+          <p:nvPr/>
+        </p:nvSpPr>
+        <p:spPr>
+          <a:xfrm xmlns:a="http://schemas.openxmlformats.org/drawingml/2006/main">
+            <a:off x="1714500" y="2990850"/>
+            <a:ext cx="9525000" cy="809625"/>
           </a:xfrm>
           <a:prstGeom xmlns:a="http://schemas.openxmlformats.org/drawingml/2006/main" prst="rect">
             <a:avLst/>
@@ -8527,7 +8531,7 @@
           <a:lstStyle xmlns:a="http://schemas.openxmlformats.org/drawingml/2006/main"/>
           <a:p xmlns:a="http://schemas.openxmlformats.org/drawingml/2006/main">
             <a:pPr algn="l">
-              <a:defRPr sz="1500" b="0">
+              <a:defRPr sz="1725" b="0">
                 <a:solidFill>
                   <a:srgbClr val="17253A"/>
                 </a:solidFill>
@@ -8537,7 +8541,7 @@
               </a:defRPr>
             </a:pPr>
             <a:r>
-              <a:rPr sz="1500" b="0">
+              <a:rPr sz="1725" b="0">
                 <a:solidFill>
                   <a:srgbClr val="17253A"/>
                 </a:solidFill>
@@ -8545,7 +8549,7 @@
                 <a:ea typeface="Arial"/>
                 <a:cs typeface="Arial"/>
               </a:rPr>
-              <a:t>Set up the method: Work systematically from the smallest possible factor or multiple.</a:t>
+              <a:t>144 = 12 × 12 → square</a:t>
             </a:r>
           </a:p>
         </p:txBody>
@@ -8555,28 +8559,30 @@
           <p:cNvPr id="17" name="">
             <a:extLst xmlns:a="http://schemas.openxmlformats.org/drawingml/2006/main">
               <a:ext uri="{FF2B5EF4-FFF2-40B4-BE49-F238E27FC236}">
-                <a16:creationId xmlns:a16="http://schemas.microsoft.com/office/drawing/2014/main" id="{FF9D4EA0-DB3E-4C95-B725-E28DCEC5E484}"/>
-              </a:ext>
-            </a:extLst>
-          </p:cNvPr>
-          <p:cNvSpPr>
-            <a:spLocks xmlns:a="http://schemas.openxmlformats.org/drawingml/2006/main" noGrp="1"/>
-          </p:cNvSpPr>
-          <p:nvPr/>
-        </p:nvSpPr>
-        <p:spPr>
-          <a:xfrm xmlns:a="http://schemas.openxmlformats.org/drawingml/2006/main">
-            <a:off x="1000125" y="3733800"/>
-            <a:ext cx="476250" cy="476250"/>
-          </a:xfrm>
-          <a:prstGeom xmlns:a="http://schemas.openxmlformats.org/drawingml/2006/main" prst="ellipse">
+                <a16:creationId xmlns:a16="http://schemas.microsoft.com/office/drawing/2014/main" id="{8B712FE4-324D-4C06-890F-3EACE4081665}"/>
+              </a:ext>
+            </a:extLst>
+          </p:cNvPr>
+          <p:cNvSpPr>
+            <a:spLocks xmlns:a="http://schemas.openxmlformats.org/drawingml/2006/main" noGrp="1"/>
+          </p:cNvSpPr>
+          <p:nvPr/>
+        </p:nvSpPr>
+        <p:spPr>
+          <a:xfrm xmlns:a="http://schemas.openxmlformats.org/drawingml/2006/main">
+            <a:off x="1714500" y="3819525"/>
+            <a:ext cx="9334500" cy="9525"/>
+          </a:xfrm>
+          <a:prstGeom xmlns:a="http://schemas.openxmlformats.org/drawingml/2006/main" prst="rect">
             <a:avLst/>
           </a:prstGeom>
           <a:solidFill xmlns:a="http://schemas.openxmlformats.org/drawingml/2006/main">
-            <a:srgbClr val="2C6E73"/>
+            <a:srgbClr val="D9E0E6"/>
           </a:solidFill>
           <a:ln xmlns:a="http://schemas.openxmlformats.org/drawingml/2006/main" w="0">
-            <a:noFill/>
+            <a:solidFill>
+              <a:srgbClr val="D9E0E6"/>
+            </a:solidFill>
           </a:ln>
         </p:spPr>
       </p:sp>
@@ -8585,19 +8591,19 @@
           <p:cNvPr id="18" name="">
             <a:extLst xmlns:a="http://schemas.openxmlformats.org/drawingml/2006/main">
               <a:ext uri="{FF2B5EF4-FFF2-40B4-BE49-F238E27FC236}">
-                <a16:creationId xmlns:a16="http://schemas.microsoft.com/office/drawing/2014/main" id="{F562BD95-7C4D-4D38-A742-7E6505855F7D}"/>
-              </a:ext>
-            </a:extLst>
-          </p:cNvPr>
-          <p:cNvSpPr>
-            <a:spLocks xmlns:a="http://schemas.openxmlformats.org/drawingml/2006/main" noGrp="1"/>
-          </p:cNvSpPr>
-          <p:nvPr/>
-        </p:nvSpPr>
-        <p:spPr>
-          <a:xfrm xmlns:a="http://schemas.openxmlformats.org/drawingml/2006/main">
-            <a:off x="1000125" y="3762375"/>
-            <a:ext cx="476250" cy="419100"/>
+                <a16:creationId xmlns:a16="http://schemas.microsoft.com/office/drawing/2014/main" id="{8A03E437-3AD4-4DFF-8B1E-057CD7611862}"/>
+              </a:ext>
+            </a:extLst>
+          </p:cNvPr>
+          <p:cNvSpPr>
+            <a:spLocks xmlns:a="http://schemas.openxmlformats.org/drawingml/2006/main" noGrp="1"/>
+          </p:cNvSpPr>
+          <p:nvPr/>
+        </p:nvSpPr>
+        <p:spPr>
+          <a:xfrm xmlns:a="http://schemas.openxmlformats.org/drawingml/2006/main">
+            <a:off x="1162050" y="3952875"/>
+            <a:ext cx="400050" cy="400050"/>
           </a:xfrm>
           <a:prstGeom xmlns:a="http://schemas.openxmlformats.org/drawingml/2006/main" prst="rect">
             <a:avLst/>
@@ -8614,9 +8620,9 @@
           <a:lstStyle xmlns:a="http://schemas.openxmlformats.org/drawingml/2006/main"/>
           <a:p xmlns:a="http://schemas.openxmlformats.org/drawingml/2006/main">
             <a:pPr algn="ctr">
-              <a:defRPr sz="1350" b="1">
-                <a:solidFill>
-                  <a:srgbClr val="FFFFFF"/>
+              <a:defRPr sz="1125" b="1">
+                <a:solidFill>
+                  <a:srgbClr val="2C6E73"/>
                 </a:solidFill>
                 <a:latin typeface="Arial"/>
                 <a:ea typeface="Arial"/>
@@ -8624,9 +8630,9 @@
               </a:defRPr>
             </a:pPr>
             <a:r>
-              <a:rPr sz="1350" b="1">
-                <a:solidFill>
-                  <a:srgbClr val="FFFFFF"/>
+              <a:rPr sz="1125" b="1">
+                <a:solidFill>
+                  <a:srgbClr val="2C6E73"/>
                 </a:solidFill>
                 <a:latin typeface="Arial"/>
                 <a:ea typeface="Arial"/>
@@ -8642,19 +8648,19 @@
           <p:cNvPr id="19" name="">
             <a:extLst xmlns:a="http://schemas.openxmlformats.org/drawingml/2006/main">
               <a:ext uri="{FF2B5EF4-FFF2-40B4-BE49-F238E27FC236}">
-                <a16:creationId xmlns:a16="http://schemas.microsoft.com/office/drawing/2014/main" id="{525C7CDB-60B2-4F74-9802-E3A0A8822FCB}"/>
-              </a:ext>
-            </a:extLst>
-          </p:cNvPr>
-          <p:cNvSpPr>
-            <a:spLocks xmlns:a="http://schemas.openxmlformats.org/drawingml/2006/main" noGrp="1"/>
-          </p:cNvSpPr>
-          <p:nvPr/>
-        </p:nvSpPr>
-        <p:spPr>
-          <a:xfrm xmlns:a="http://schemas.openxmlformats.org/drawingml/2006/main">
-            <a:off x="1714500" y="3667125"/>
-            <a:ext cx="9429750" cy="609600"/>
+                <a16:creationId xmlns:a16="http://schemas.microsoft.com/office/drawing/2014/main" id="{1C131782-0996-43FA-8961-16121B05B89D}"/>
+              </a:ext>
+            </a:extLst>
+          </p:cNvPr>
+          <p:cNvSpPr>
+            <a:spLocks xmlns:a="http://schemas.openxmlformats.org/drawingml/2006/main" noGrp="1"/>
+          </p:cNvSpPr>
+          <p:nvPr/>
+        </p:nvSpPr>
+        <p:spPr>
+          <a:xfrm xmlns:a="http://schemas.openxmlformats.org/drawingml/2006/main">
+            <a:off x="1714500" y="3867150"/>
+            <a:ext cx="9525000" cy="809625"/>
           </a:xfrm>
           <a:prstGeom xmlns:a="http://schemas.openxmlformats.org/drawingml/2006/main" prst="rect">
             <a:avLst/>
@@ -8671,7 +8677,7 @@
           <a:lstStyle xmlns:a="http://schemas.openxmlformats.org/drawingml/2006/main"/>
           <a:p xmlns:a="http://schemas.openxmlformats.org/drawingml/2006/main">
             <a:pPr algn="l">
-              <a:defRPr sz="1500" b="0">
+              <a:defRPr sz="1725" b="0">
                 <a:solidFill>
                   <a:srgbClr val="17253A"/>
                 </a:solidFill>
@@ -8681,7 +8687,7 @@
               </a:defRPr>
             </a:pPr>
             <a:r>
-              <a:rPr sz="1500" b="0">
+              <a:rPr sz="1725" b="0">
                 <a:solidFill>
                   <a:srgbClr val="17253A"/>
                 </a:solidFill>
@@ -8689,7 +8695,7 @@
                 <a:ea typeface="Arial"/>
                 <a:cs typeface="Arial"/>
               </a:rPr>
-              <a:t>Complete the calculation: 97 is prime; 144 is square; 125 is cube.</a:t>
+              <a:t>125 = 5 × 5 × 5 → cube</a:t>
             </a:r>
           </a:p>
         </p:txBody>
@@ -8699,28 +8705,30 @@
           <p:cNvPr id="20" name="">
             <a:extLst xmlns:a="http://schemas.openxmlformats.org/drawingml/2006/main">
               <a:ext uri="{FF2B5EF4-FFF2-40B4-BE49-F238E27FC236}">
-                <a16:creationId xmlns:a16="http://schemas.microsoft.com/office/drawing/2014/main" id="{823FD600-07BF-4608-8BC8-3543FE415118}"/>
-              </a:ext>
-            </a:extLst>
-          </p:cNvPr>
-          <p:cNvSpPr>
-            <a:spLocks xmlns:a="http://schemas.openxmlformats.org/drawingml/2006/main" noGrp="1"/>
-          </p:cNvSpPr>
-          <p:nvPr/>
-        </p:nvSpPr>
-        <p:spPr>
-          <a:xfrm xmlns:a="http://schemas.openxmlformats.org/drawingml/2006/main">
-            <a:off x="1000125" y="4476750"/>
-            <a:ext cx="476250" cy="476250"/>
-          </a:xfrm>
-          <a:prstGeom xmlns:a="http://schemas.openxmlformats.org/drawingml/2006/main" prst="ellipse">
+                <a16:creationId xmlns:a16="http://schemas.microsoft.com/office/drawing/2014/main" id="{45799502-D41E-4A00-986D-A964552534D2}"/>
+              </a:ext>
+            </a:extLst>
+          </p:cNvPr>
+          <p:cNvSpPr>
+            <a:spLocks xmlns:a="http://schemas.openxmlformats.org/drawingml/2006/main" noGrp="1"/>
+          </p:cNvSpPr>
+          <p:nvPr/>
+        </p:nvSpPr>
+        <p:spPr>
+          <a:xfrm xmlns:a="http://schemas.openxmlformats.org/drawingml/2006/main">
+            <a:off x="1714500" y="4695825"/>
+            <a:ext cx="9334500" cy="9525"/>
+          </a:xfrm>
+          <a:prstGeom xmlns:a="http://schemas.openxmlformats.org/drawingml/2006/main" prst="rect">
             <a:avLst/>
           </a:prstGeom>
           <a:solidFill xmlns:a="http://schemas.openxmlformats.org/drawingml/2006/main">
-            <a:srgbClr val="2C6E73"/>
+            <a:srgbClr val="D9E0E6"/>
           </a:solidFill>
           <a:ln xmlns:a="http://schemas.openxmlformats.org/drawingml/2006/main" w="0">
-            <a:noFill/>
+            <a:solidFill>
+              <a:srgbClr val="D9E0E6"/>
+            </a:solidFill>
           </a:ln>
         </p:spPr>
       </p:sp>
@@ -8729,19 +8737,19 @@
           <p:cNvPr id="21" name="">
             <a:extLst xmlns:a="http://schemas.openxmlformats.org/drawingml/2006/main">
               <a:ext uri="{FF2B5EF4-FFF2-40B4-BE49-F238E27FC236}">
-                <a16:creationId xmlns:a16="http://schemas.microsoft.com/office/drawing/2014/main" id="{1C23A36B-39CE-49C4-A38C-566A2AF1F8C0}"/>
-              </a:ext>
-            </a:extLst>
-          </p:cNvPr>
-          <p:cNvSpPr>
-            <a:spLocks xmlns:a="http://schemas.openxmlformats.org/drawingml/2006/main" noGrp="1"/>
-          </p:cNvSpPr>
-          <p:nvPr/>
-        </p:nvSpPr>
-        <p:spPr>
-          <a:xfrm xmlns:a="http://schemas.openxmlformats.org/drawingml/2006/main">
-            <a:off x="1000125" y="4505325"/>
-            <a:ext cx="476250" cy="419100"/>
+                <a16:creationId xmlns:a16="http://schemas.microsoft.com/office/drawing/2014/main" id="{DA4CEBE6-C73F-47E4-838A-28F211150D0F}"/>
+              </a:ext>
+            </a:extLst>
+          </p:cNvPr>
+          <p:cNvSpPr>
+            <a:spLocks xmlns:a="http://schemas.openxmlformats.org/drawingml/2006/main" noGrp="1"/>
+          </p:cNvSpPr>
+          <p:nvPr/>
+        </p:nvSpPr>
+        <p:spPr>
+          <a:xfrm xmlns:a="http://schemas.openxmlformats.org/drawingml/2006/main">
+            <a:off x="1162050" y="4829175"/>
+            <a:ext cx="400050" cy="400050"/>
           </a:xfrm>
           <a:prstGeom xmlns:a="http://schemas.openxmlformats.org/drawingml/2006/main" prst="rect">
             <a:avLst/>
@@ -8758,9 +8766,9 @@
           <a:lstStyle xmlns:a="http://schemas.openxmlformats.org/drawingml/2006/main"/>
           <a:p xmlns:a="http://schemas.openxmlformats.org/drawingml/2006/main">
             <a:pPr algn="ctr">
-              <a:defRPr sz="1350" b="1">
-                <a:solidFill>
-                  <a:srgbClr val="FFFFFF"/>
+              <a:defRPr sz="1125" b="1">
+                <a:solidFill>
+                  <a:srgbClr val="2F785D"/>
                 </a:solidFill>
                 <a:latin typeface="Arial"/>
                 <a:ea typeface="Arial"/>
@@ -8768,9 +8776,9 @@
               </a:defRPr>
             </a:pPr>
             <a:r>
-              <a:rPr sz="1350" b="1">
-                <a:solidFill>
-                  <a:srgbClr val="FFFFFF"/>
+              <a:rPr sz="1125" b="1">
+                <a:solidFill>
+                  <a:srgbClr val="2F785D"/>
                 </a:solidFill>
                 <a:latin typeface="Arial"/>
                 <a:ea typeface="Arial"/>
@@ -8786,19 +8794,19 @@
           <p:cNvPr id="22" name="">
             <a:extLst xmlns:a="http://schemas.openxmlformats.org/drawingml/2006/main">
               <a:ext uri="{FF2B5EF4-FFF2-40B4-BE49-F238E27FC236}">
-                <a16:creationId xmlns:a16="http://schemas.microsoft.com/office/drawing/2014/main" id="{15D72968-7942-4C7B-845D-0F79FEC1BF29}"/>
-              </a:ext>
-            </a:extLst>
-          </p:cNvPr>
-          <p:cNvSpPr>
-            <a:spLocks xmlns:a="http://schemas.openxmlformats.org/drawingml/2006/main" noGrp="1"/>
-          </p:cNvSpPr>
-          <p:nvPr/>
-        </p:nvSpPr>
-        <p:spPr>
-          <a:xfrm xmlns:a="http://schemas.openxmlformats.org/drawingml/2006/main">
-            <a:off x="1714500" y="4410075"/>
-            <a:ext cx="9429750" cy="609600"/>
+                <a16:creationId xmlns:a16="http://schemas.microsoft.com/office/drawing/2014/main" id="{A99BB799-CA40-4A51-86C2-52F7A5560135}"/>
+              </a:ext>
+            </a:extLst>
+          </p:cNvPr>
+          <p:cNvSpPr>
+            <a:spLocks xmlns:a="http://schemas.openxmlformats.org/drawingml/2006/main" noGrp="1"/>
+          </p:cNvSpPr>
+          <p:nvPr/>
+        </p:nvSpPr>
+        <p:spPr>
+          <a:xfrm xmlns:a="http://schemas.openxmlformats.org/drawingml/2006/main">
+            <a:off x="1714500" y="4743450"/>
+            <a:ext cx="9525000" cy="809625"/>
           </a:xfrm>
           <a:prstGeom xmlns:a="http://schemas.openxmlformats.org/drawingml/2006/main" prst="rect">
             <a:avLst/>
@@ -8815,7 +8823,7 @@
           <a:lstStyle xmlns:a="http://schemas.openxmlformats.org/drawingml/2006/main"/>
           <a:p xmlns:a="http://schemas.openxmlformats.org/drawingml/2006/main">
             <a:pPr algn="l">
-              <a:defRPr sz="1500" b="1">
+              <a:defRPr sz="1725" b="1">
                 <a:solidFill>
                   <a:srgbClr val="2F785D"/>
                 </a:solidFill>
@@ -8825,7 +8833,7 @@
               </a:defRPr>
             </a:pPr>
             <a:r>
-              <a:rPr sz="1500" b="1">
+              <a:rPr sz="1725" b="1">
                 <a:solidFill>
                   <a:srgbClr val="2F785D"/>
                 </a:solidFill>
@@ -8833,7 +8841,7 @@
                 <a:ea typeface="Arial"/>
                 <a:cs typeface="Arial"/>
               </a:rPr>
-              <a:t>Check the result: Check that the list is complete and use it to justify the conclusion.</a:t>
+              <a:t>97 prime     144 square     125 cube</a:t>
             </a:r>
           </a:p>
         </p:txBody>
@@ -8841,7 +8849,7 @@
     </p:spTree>
     <p:extLst>
       <p:ext uri="{BB962C8B-B14F-4D97-AF65-F5344CB8AC3E}">
-        <p14:creationId xmlns:p14="http://schemas.microsoft.com/office/powerpoint/2010/main" val="156670757"/>
+        <p14:creationId xmlns:p14="http://schemas.microsoft.com/office/powerpoint/2010/main" val="96589876"/>
       </p:ext>
     </p:extLst>
   </p:cSld>
@@ -9134,7 +9142,7 @@
           <p:cNvPr id="15" name="">
             <a:extLst xmlns:a="http://schemas.openxmlformats.org/drawingml/2006/main">
               <a:ext uri="{FF2B5EF4-FFF2-40B4-BE49-F238E27FC236}">
-                <a16:creationId xmlns:a16="http://schemas.microsoft.com/office/drawing/2014/main" id="{EC1C1371-3F56-41BB-9C1D-78A8D45A1807}"/>
+                <a16:creationId xmlns:a16="http://schemas.microsoft.com/office/drawing/2014/main" id="{06925C4F-FC03-4C3D-9F5E-591C5D187B0E}"/>
               </a:ext>
             </a:extLst>
           </p:cNvPr>
@@ -9166,7 +9174,7 @@
           <p:cNvPr id="2" name="">
             <a:extLst xmlns:a="http://schemas.openxmlformats.org/drawingml/2006/main">
               <a:ext uri="{FF2B5EF4-FFF2-40B4-BE49-F238E27FC236}">
-                <a16:creationId xmlns:a16="http://schemas.microsoft.com/office/drawing/2014/main" id="{E5730140-4562-46EB-969E-5FDB42CCF225}"/>
+                <a16:creationId xmlns:a16="http://schemas.microsoft.com/office/drawing/2014/main" id="{BF1DE736-6C54-4754-9AE1-7A217E629336}"/>
               </a:ext>
             </a:extLst>
           </p:cNvPr>
@@ -9223,7 +9231,7 @@
           <p:cNvPr id="3" name="">
             <a:extLst xmlns:a="http://schemas.openxmlformats.org/drawingml/2006/main">
               <a:ext uri="{FF2B5EF4-FFF2-40B4-BE49-F238E27FC236}">
-                <a16:creationId xmlns:a16="http://schemas.microsoft.com/office/drawing/2014/main" id="{61A3C6A3-66EB-4AB4-848D-B2A972BBBF41}"/>
+                <a16:creationId xmlns:a16="http://schemas.microsoft.com/office/drawing/2014/main" id="{74F1232C-3CD8-45D9-9AD8-D9281936B166}"/>
               </a:ext>
             </a:extLst>
           </p:cNvPr>
@@ -9255,7 +9263,7 @@
           <p:cNvPr id="4" name="">
             <a:extLst xmlns:a="http://schemas.openxmlformats.org/drawingml/2006/main">
               <a:ext uri="{FF2B5EF4-FFF2-40B4-BE49-F238E27FC236}">
-                <a16:creationId xmlns:a16="http://schemas.microsoft.com/office/drawing/2014/main" id="{290DCCA4-1C7A-4D02-BAC0-E5E75516C074}"/>
+                <a16:creationId xmlns:a16="http://schemas.microsoft.com/office/drawing/2014/main" id="{219322C6-54FC-4706-AFF4-43F886920ED1}"/>
               </a:ext>
             </a:extLst>
           </p:cNvPr>
@@ -9312,7 +9320,7 @@
           <p:cNvPr id="5" name="">
             <a:extLst xmlns:a="http://schemas.openxmlformats.org/drawingml/2006/main">
               <a:ext uri="{FF2B5EF4-FFF2-40B4-BE49-F238E27FC236}">
-                <a16:creationId xmlns:a16="http://schemas.microsoft.com/office/drawing/2014/main" id="{F5DA6A14-2810-4224-B90E-7C08E4052DC0}"/>
+                <a16:creationId xmlns:a16="http://schemas.microsoft.com/office/drawing/2014/main" id="{9B9654C2-7344-4A20-BA6B-2CBB051568FE}"/>
               </a:ext>
             </a:extLst>
           </p:cNvPr>
@@ -9369,7 +9377,7 @@
           <p:cNvPr id="6" name="">
             <a:extLst xmlns:a="http://schemas.openxmlformats.org/drawingml/2006/main">
               <a:ext uri="{FF2B5EF4-FFF2-40B4-BE49-F238E27FC236}">
-                <a16:creationId xmlns:a16="http://schemas.microsoft.com/office/drawing/2014/main" id="{5D0D1CFB-E681-485B-BC13-3A3DF4FB4CD0}"/>
+                <a16:creationId xmlns:a16="http://schemas.microsoft.com/office/drawing/2014/main" id="{15CDD1C2-5F8F-4EC2-BBBB-CE03955798B7}"/>
               </a:ext>
             </a:extLst>
           </p:cNvPr>
@@ -9426,7 +9434,7 @@
           <p:cNvPr id="7" name="">
             <a:extLst xmlns:a="http://schemas.openxmlformats.org/drawingml/2006/main">
               <a:ext uri="{FF2B5EF4-FFF2-40B4-BE49-F238E27FC236}">
-                <a16:creationId xmlns:a16="http://schemas.microsoft.com/office/drawing/2014/main" id="{C18FFB9D-EC7A-4F84-8BAA-233C45CC330F}"/>
+                <a16:creationId xmlns:a16="http://schemas.microsoft.com/office/drawing/2014/main" id="{8A7CCAEB-F4A4-4D0B-B2D4-4ABFD8DAFD09}"/>
               </a:ext>
             </a:extLst>
           </p:cNvPr>
@@ -9458,7 +9466,7 @@
           <p:cNvPr id="8" name="">
             <a:extLst xmlns:a="http://schemas.openxmlformats.org/drawingml/2006/main">
               <a:ext uri="{FF2B5EF4-FFF2-40B4-BE49-F238E27FC236}">
-                <a16:creationId xmlns:a16="http://schemas.microsoft.com/office/drawing/2014/main" id="{FF0E6CBF-C0DB-4C55-A1DF-99DA5A91A377}"/>
+                <a16:creationId xmlns:a16="http://schemas.microsoft.com/office/drawing/2014/main" id="{7E5179AE-4E3A-48DD-AF59-ECDD51D52D19}"/>
               </a:ext>
             </a:extLst>
           </p:cNvPr>
@@ -9515,7 +9523,7 @@
           <p:cNvPr id="9" name="">
             <a:extLst xmlns:a="http://schemas.openxmlformats.org/drawingml/2006/main">
               <a:ext uri="{FF2B5EF4-FFF2-40B4-BE49-F238E27FC236}">
-                <a16:creationId xmlns:a16="http://schemas.microsoft.com/office/drawing/2014/main" id="{A4D0B0A3-E3DB-4827-B021-BA3433025655}"/>
+                <a16:creationId xmlns:a16="http://schemas.microsoft.com/office/drawing/2014/main" id="{D50F34A6-D19A-48D7-844F-96A7DCA20223}"/>
               </a:ext>
             </a:extLst>
           </p:cNvPr>
@@ -9572,7 +9580,7 @@
           <p:cNvPr id="10" name="">
             <a:extLst xmlns:a="http://schemas.openxmlformats.org/drawingml/2006/main">
               <a:ext uri="{FF2B5EF4-FFF2-40B4-BE49-F238E27FC236}">
-                <a16:creationId xmlns:a16="http://schemas.microsoft.com/office/drawing/2014/main" id="{48D3B47C-6087-4E01-8DB0-F96B7EFF69D4}"/>
+                <a16:creationId xmlns:a16="http://schemas.microsoft.com/office/drawing/2014/main" id="{A32FB6F6-4FD0-4942-A935-F03548C855D1}"/>
               </a:ext>
             </a:extLst>
           </p:cNvPr>
@@ -9629,7 +9637,7 @@
           <p:cNvPr id="11" name="">
             <a:extLst xmlns:a="http://schemas.openxmlformats.org/drawingml/2006/main">
               <a:ext uri="{FF2B5EF4-FFF2-40B4-BE49-F238E27FC236}">
-                <a16:creationId xmlns:a16="http://schemas.microsoft.com/office/drawing/2014/main" id="{4C8CC5AB-6073-45E6-91BE-133FF51E0B13}"/>
+                <a16:creationId xmlns:a16="http://schemas.microsoft.com/office/drawing/2014/main" id="{CF9D2403-1550-48A1-8720-105CC6179AD0}"/>
               </a:ext>
             </a:extLst>
           </p:cNvPr>
@@ -9686,7 +9694,7 @@
           <p:cNvPr id="12" name="">
             <a:extLst xmlns:a="http://schemas.openxmlformats.org/drawingml/2006/main">
               <a:ext uri="{FF2B5EF4-FFF2-40B4-BE49-F238E27FC236}">
-                <a16:creationId xmlns:a16="http://schemas.microsoft.com/office/drawing/2014/main" id="{064807A0-EA7C-4FD9-89E3-0ED7068C2A0C}"/>
+                <a16:creationId xmlns:a16="http://schemas.microsoft.com/office/drawing/2014/main" id="{034C37BD-3E51-481A-864B-E65809C1B350}"/>
               </a:ext>
             </a:extLst>
           </p:cNvPr>
@@ -9718,7 +9726,7 @@
           <p:cNvPr id="13" name="">
             <a:extLst xmlns:a="http://schemas.openxmlformats.org/drawingml/2006/main">
               <a:ext uri="{FF2B5EF4-FFF2-40B4-BE49-F238E27FC236}">
-                <a16:creationId xmlns:a16="http://schemas.microsoft.com/office/drawing/2014/main" id="{E48E8CAE-3E98-400D-A54A-703A092C5583}"/>
+                <a16:creationId xmlns:a16="http://schemas.microsoft.com/office/drawing/2014/main" id="{42EF9EB0-34A7-4674-BA29-B05AE65516DA}"/>
               </a:ext>
             </a:extLst>
           </p:cNvPr>
@@ -9775,7 +9783,7 @@
           <p:cNvPr id="14" name="">
             <a:extLst xmlns:a="http://schemas.openxmlformats.org/drawingml/2006/main">
               <a:ext uri="{FF2B5EF4-FFF2-40B4-BE49-F238E27FC236}">
-                <a16:creationId xmlns:a16="http://schemas.microsoft.com/office/drawing/2014/main" id="{C014A732-4244-42CB-9850-3EA25E8CCB32}"/>
+                <a16:creationId xmlns:a16="http://schemas.microsoft.com/office/drawing/2014/main" id="{69EEB5E1-BE65-4801-9E82-B48B2316E7FC}"/>
               </a:ext>
             </a:extLst>
           </p:cNvPr>
@@ -9830,7 +9838,7 @@
     </p:spTree>
     <p:extLst>
       <p:ext uri="{BB962C8B-B14F-4D97-AF65-F5344CB8AC3E}">
-        <p14:creationId xmlns:p14="http://schemas.microsoft.com/office/powerpoint/2010/main" val="1469118805"/>
+        <p14:creationId xmlns:p14="http://schemas.microsoft.com/office/powerpoint/2010/main" val="1721863677"/>
       </p:ext>
     </p:extLst>
   </p:cSld>
@@ -10031,7 +10039,7 @@
           <p:cNvPr id="16" name="">
             <a:extLst xmlns:a="http://schemas.openxmlformats.org/drawingml/2006/main">
               <a:ext uri="{FF2B5EF4-FFF2-40B4-BE49-F238E27FC236}">
-                <a16:creationId xmlns:a16="http://schemas.microsoft.com/office/drawing/2014/main" id="{79B60226-C2D1-42AD-A9FB-C948180A60D9}"/>
+                <a16:creationId xmlns:a16="http://schemas.microsoft.com/office/drawing/2014/main" id="{5A9E931B-FC62-46CB-B559-BC11A699C6D0}"/>
               </a:ext>
             </a:extLst>
           </p:cNvPr>
@@ -10063,7 +10071,7 @@
           <p:cNvPr id="2" name="">
             <a:extLst xmlns:a="http://schemas.openxmlformats.org/drawingml/2006/main">
               <a:ext uri="{FF2B5EF4-FFF2-40B4-BE49-F238E27FC236}">
-                <a16:creationId xmlns:a16="http://schemas.microsoft.com/office/drawing/2014/main" id="{286DFE8A-A53A-428F-AD73-2C392FAC8115}"/>
+                <a16:creationId xmlns:a16="http://schemas.microsoft.com/office/drawing/2014/main" id="{13FF1151-1B4A-4FBD-8FF1-95B3A7B97829}"/>
               </a:ext>
             </a:extLst>
           </p:cNvPr>
@@ -10120,7 +10128,7 @@
           <p:cNvPr id="3" name="">
             <a:extLst xmlns:a="http://schemas.openxmlformats.org/drawingml/2006/main">
               <a:ext uri="{FF2B5EF4-FFF2-40B4-BE49-F238E27FC236}">
-                <a16:creationId xmlns:a16="http://schemas.microsoft.com/office/drawing/2014/main" id="{E4A80614-6FB0-4AE7-B3D2-DA3DFA8E77BB}"/>
+                <a16:creationId xmlns:a16="http://schemas.microsoft.com/office/drawing/2014/main" id="{F1BBD0E5-98FC-409C-9A98-DF4C3AF4C36E}"/>
               </a:ext>
             </a:extLst>
           </p:cNvPr>
@@ -10152,7 +10160,7 @@
           <p:cNvPr id="4" name="">
             <a:extLst xmlns:a="http://schemas.openxmlformats.org/drawingml/2006/main">
               <a:ext uri="{FF2B5EF4-FFF2-40B4-BE49-F238E27FC236}">
-                <a16:creationId xmlns:a16="http://schemas.microsoft.com/office/drawing/2014/main" id="{2FEDCB5D-1FCD-42F4-AEBB-D9C835FBE35B}"/>
+                <a16:creationId xmlns:a16="http://schemas.microsoft.com/office/drawing/2014/main" id="{836EA4A7-EF14-4BD2-A49E-7C2A89E31DFE}"/>
               </a:ext>
             </a:extLst>
           </p:cNvPr>
@@ -10209,7 +10217,7 @@
           <p:cNvPr id="5" name="">
             <a:extLst xmlns:a="http://schemas.openxmlformats.org/drawingml/2006/main">
               <a:ext uri="{FF2B5EF4-FFF2-40B4-BE49-F238E27FC236}">
-                <a16:creationId xmlns:a16="http://schemas.microsoft.com/office/drawing/2014/main" id="{2E495F6F-07A3-4D77-AD75-4AE8DC3DD0E6}"/>
+                <a16:creationId xmlns:a16="http://schemas.microsoft.com/office/drawing/2014/main" id="{71726E6D-DE55-4A14-B44A-FAF1B88503AD}"/>
               </a:ext>
             </a:extLst>
           </p:cNvPr>
@@ -10266,7 +10274,7 @@
           <p:cNvPr id="6" name="">
             <a:extLst xmlns:a="http://schemas.openxmlformats.org/drawingml/2006/main">
               <a:ext uri="{FF2B5EF4-FFF2-40B4-BE49-F238E27FC236}">
-                <a16:creationId xmlns:a16="http://schemas.microsoft.com/office/drawing/2014/main" id="{B52E4281-6F31-4D49-8F4A-52822C765580}"/>
+                <a16:creationId xmlns:a16="http://schemas.microsoft.com/office/drawing/2014/main" id="{93F49CB9-5301-46B9-BE93-2FBD71F6ACE5}"/>
               </a:ext>
             </a:extLst>
           </p:cNvPr>
@@ -10323,7 +10331,7 @@
           <p:cNvPr id="7" name="">
             <a:extLst xmlns:a="http://schemas.openxmlformats.org/drawingml/2006/main">
               <a:ext uri="{FF2B5EF4-FFF2-40B4-BE49-F238E27FC236}">
-                <a16:creationId xmlns:a16="http://schemas.microsoft.com/office/drawing/2014/main" id="{89BEE122-0CED-4F71-9748-99E83CADFD07}"/>
+                <a16:creationId xmlns:a16="http://schemas.microsoft.com/office/drawing/2014/main" id="{61F14BC4-CA43-4B63-8163-C5AEC6301009}"/>
               </a:ext>
             </a:extLst>
           </p:cNvPr>
@@ -10355,7 +10363,7 @@
           <p:cNvPr id="8" name="">
             <a:extLst xmlns:a="http://schemas.openxmlformats.org/drawingml/2006/main">
               <a:ext uri="{FF2B5EF4-FFF2-40B4-BE49-F238E27FC236}">
-                <a16:creationId xmlns:a16="http://schemas.microsoft.com/office/drawing/2014/main" id="{407F77F4-A9B7-47CC-B399-9F36BA1EAB65}"/>
+                <a16:creationId xmlns:a16="http://schemas.microsoft.com/office/drawing/2014/main" id="{484DD425-DF4C-4076-BA37-A30FBDBBA763}"/>
               </a:ext>
             </a:extLst>
           </p:cNvPr>
@@ -10412,7 +10420,7 @@
           <p:cNvPr id="9" name="">
             <a:extLst xmlns:a="http://schemas.openxmlformats.org/drawingml/2006/main">
               <a:ext uri="{FF2B5EF4-FFF2-40B4-BE49-F238E27FC236}">
-                <a16:creationId xmlns:a16="http://schemas.microsoft.com/office/drawing/2014/main" id="{9067E571-F89B-4313-BD94-40875B8178D5}"/>
+                <a16:creationId xmlns:a16="http://schemas.microsoft.com/office/drawing/2014/main" id="{DC9321FF-A972-45A6-9A50-93DD4FB4EF15}"/>
               </a:ext>
             </a:extLst>
           </p:cNvPr>
@@ -10469,7 +10477,7 @@
           <p:cNvPr id="10" name="">
             <a:extLst xmlns:a="http://schemas.openxmlformats.org/drawingml/2006/main">
               <a:ext uri="{FF2B5EF4-FFF2-40B4-BE49-F238E27FC236}">
-                <a16:creationId xmlns:a16="http://schemas.microsoft.com/office/drawing/2014/main" id="{C972CD87-B823-4801-82FF-8A8638E5F0B1}"/>
+                <a16:creationId xmlns:a16="http://schemas.microsoft.com/office/drawing/2014/main" id="{47A7651C-CF77-40AA-A40A-D43FE18AB68D}"/>
               </a:ext>
             </a:extLst>
           </p:cNvPr>
@@ -10526,7 +10534,7 @@
           <p:cNvPr id="11" name="">
             <a:extLst xmlns:a="http://schemas.openxmlformats.org/drawingml/2006/main">
               <a:ext uri="{FF2B5EF4-FFF2-40B4-BE49-F238E27FC236}">
-                <a16:creationId xmlns:a16="http://schemas.microsoft.com/office/drawing/2014/main" id="{99919462-C5B6-4A33-B2B8-BCDE3BB958A1}"/>
+                <a16:creationId xmlns:a16="http://schemas.microsoft.com/office/drawing/2014/main" id="{DC863C24-7464-47CE-94E4-1C73233F95C6}"/>
               </a:ext>
             </a:extLst>
           </p:cNvPr>
@@ -10583,7 +10591,7 @@
           <p:cNvPr id="12" name="">
             <a:extLst xmlns:a="http://schemas.openxmlformats.org/drawingml/2006/main">
               <a:ext uri="{FF2B5EF4-FFF2-40B4-BE49-F238E27FC236}">
-                <a16:creationId xmlns:a16="http://schemas.microsoft.com/office/drawing/2014/main" id="{D0253120-662D-4169-A208-1861A996240A}"/>
+                <a16:creationId xmlns:a16="http://schemas.microsoft.com/office/drawing/2014/main" id="{07AF9688-983F-4CC3-AB90-36E36B60D9BB}"/>
               </a:ext>
             </a:extLst>
           </p:cNvPr>
@@ -10640,7 +10648,7 @@
           <p:cNvPr id="13" name="">
             <a:extLst xmlns:a="http://schemas.openxmlformats.org/drawingml/2006/main">
               <a:ext uri="{FF2B5EF4-FFF2-40B4-BE49-F238E27FC236}">
-                <a16:creationId xmlns:a16="http://schemas.microsoft.com/office/drawing/2014/main" id="{D93C8217-CC7B-4B89-AC9C-B559BF4DA243}"/>
+                <a16:creationId xmlns:a16="http://schemas.microsoft.com/office/drawing/2014/main" id="{5E584044-F714-4BF1-B20C-25861046CC73}"/>
               </a:ext>
             </a:extLst>
           </p:cNvPr>
@@ -10697,7 +10705,7 @@
           <p:cNvPr id="14" name="">
             <a:extLst xmlns:a="http://schemas.openxmlformats.org/drawingml/2006/main">
               <a:ext uri="{FF2B5EF4-FFF2-40B4-BE49-F238E27FC236}">
-                <a16:creationId xmlns:a16="http://schemas.microsoft.com/office/drawing/2014/main" id="{75EE1B79-6845-4235-978C-9870F50C4C16}"/>
+                <a16:creationId xmlns:a16="http://schemas.microsoft.com/office/drawing/2014/main" id="{64DEB194-AD8B-46CD-A949-47F64ADEBABE}"/>
               </a:ext>
             </a:extLst>
           </p:cNvPr>
@@ -10754,7 +10762,7 @@
           <p:cNvPr id="15" name="">
             <a:extLst xmlns:a="http://schemas.openxmlformats.org/drawingml/2006/main">
               <a:ext uri="{FF2B5EF4-FFF2-40B4-BE49-F238E27FC236}">
-                <a16:creationId xmlns:a16="http://schemas.microsoft.com/office/drawing/2014/main" id="{DAC91A7A-4CBF-4B17-ACEC-9D8878B788F2}"/>
+                <a16:creationId xmlns:a16="http://schemas.microsoft.com/office/drawing/2014/main" id="{BF484F85-02C4-4D7F-B2D9-0818F1012EAA}"/>
               </a:ext>
             </a:extLst>
           </p:cNvPr>
@@ -10809,7 +10817,7 @@
     </p:spTree>
     <p:extLst>
       <p:ext uri="{BB962C8B-B14F-4D97-AF65-F5344CB8AC3E}">
-        <p14:creationId xmlns:p14="http://schemas.microsoft.com/office/powerpoint/2010/main" val="489897351"/>
+        <p14:creationId xmlns:p14="http://schemas.microsoft.com/office/powerpoint/2010/main" val="1098017091"/>
       </p:ext>
     </p:extLst>
   </p:cSld>
@@ -10964,7 +10972,7 @@
           <p:cNvPr id="16" name="">
             <a:extLst xmlns:a="http://schemas.openxmlformats.org/drawingml/2006/main">
               <a:ext uri="{FF2B5EF4-FFF2-40B4-BE49-F238E27FC236}">
-                <a16:creationId xmlns:a16="http://schemas.microsoft.com/office/drawing/2014/main" id="{4944B340-510C-482B-B3D9-38F0393C7E91}"/>
+                <a16:creationId xmlns:a16="http://schemas.microsoft.com/office/drawing/2014/main" id="{24E51BFE-A2A9-46D1-9467-2EF8C21B9EBB}"/>
               </a:ext>
             </a:extLst>
           </p:cNvPr>
@@ -10996,7 +11004,7 @@
           <p:cNvPr id="2" name="">
             <a:extLst xmlns:a="http://schemas.openxmlformats.org/drawingml/2006/main">
               <a:ext uri="{FF2B5EF4-FFF2-40B4-BE49-F238E27FC236}">
-                <a16:creationId xmlns:a16="http://schemas.microsoft.com/office/drawing/2014/main" id="{A4A9EE4A-70F9-4B73-B708-6C75AD770847}"/>
+                <a16:creationId xmlns:a16="http://schemas.microsoft.com/office/drawing/2014/main" id="{85821F92-7922-4028-9226-8ABFA89A88EA}"/>
               </a:ext>
             </a:extLst>
           </p:cNvPr>
@@ -11053,7 +11061,7 @@
           <p:cNvPr id="3" name="">
             <a:extLst xmlns:a="http://schemas.openxmlformats.org/drawingml/2006/main">
               <a:ext uri="{FF2B5EF4-FFF2-40B4-BE49-F238E27FC236}">
-                <a16:creationId xmlns:a16="http://schemas.microsoft.com/office/drawing/2014/main" id="{EEF43438-07E1-4A92-8785-AEEACFBDC755}"/>
+                <a16:creationId xmlns:a16="http://schemas.microsoft.com/office/drawing/2014/main" id="{77CE935E-2308-4C55-92B0-BF712FEA3ADC}"/>
               </a:ext>
             </a:extLst>
           </p:cNvPr>
@@ -11085,7 +11093,7 @@
           <p:cNvPr id="4" name="">
             <a:extLst xmlns:a="http://schemas.openxmlformats.org/drawingml/2006/main">
               <a:ext uri="{FF2B5EF4-FFF2-40B4-BE49-F238E27FC236}">
-                <a16:creationId xmlns:a16="http://schemas.microsoft.com/office/drawing/2014/main" id="{3C3EFED7-6D40-43C1-A876-D0911CA48AC9}"/>
+                <a16:creationId xmlns:a16="http://schemas.microsoft.com/office/drawing/2014/main" id="{654FCEA9-41F5-4B9E-BC5B-893B6D346CC6}"/>
               </a:ext>
             </a:extLst>
           </p:cNvPr>
@@ -11142,7 +11150,7 @@
           <p:cNvPr id="5" name="">
             <a:extLst xmlns:a="http://schemas.openxmlformats.org/drawingml/2006/main">
               <a:ext uri="{FF2B5EF4-FFF2-40B4-BE49-F238E27FC236}">
-                <a16:creationId xmlns:a16="http://schemas.microsoft.com/office/drawing/2014/main" id="{80751518-401D-4A84-9459-A008098DFE25}"/>
+                <a16:creationId xmlns:a16="http://schemas.microsoft.com/office/drawing/2014/main" id="{22BB8B24-8525-4DD4-9287-5851D890537F}"/>
               </a:ext>
             </a:extLst>
           </p:cNvPr>
@@ -11199,7 +11207,7 @@
           <p:cNvPr id="6" name="">
             <a:extLst xmlns:a="http://schemas.openxmlformats.org/drawingml/2006/main">
               <a:ext uri="{FF2B5EF4-FFF2-40B4-BE49-F238E27FC236}">
-                <a16:creationId xmlns:a16="http://schemas.microsoft.com/office/drawing/2014/main" id="{59614E6E-80B6-486D-8716-0CAA5D43B975}"/>
+                <a16:creationId xmlns:a16="http://schemas.microsoft.com/office/drawing/2014/main" id="{B94CEB1F-5352-4359-9CC5-F273399E7510}"/>
               </a:ext>
             </a:extLst>
           </p:cNvPr>
@@ -11256,7 +11264,7 @@
           <p:cNvPr id="7" name="">
             <a:extLst xmlns:a="http://schemas.openxmlformats.org/drawingml/2006/main">
               <a:ext uri="{FF2B5EF4-FFF2-40B4-BE49-F238E27FC236}">
-                <a16:creationId xmlns:a16="http://schemas.microsoft.com/office/drawing/2014/main" id="{5E2E8849-F167-4276-A81E-AB56AA2B4ABC}"/>
+                <a16:creationId xmlns:a16="http://schemas.microsoft.com/office/drawing/2014/main" id="{D6E6CA26-D0A8-49EC-BDC0-9ABE411EDA8C}"/>
               </a:ext>
             </a:extLst>
           </p:cNvPr>
@@ -11288,7 +11296,7 @@
           <p:cNvPr id="8" name="">
             <a:extLst xmlns:a="http://schemas.openxmlformats.org/drawingml/2006/main">
               <a:ext uri="{FF2B5EF4-FFF2-40B4-BE49-F238E27FC236}">
-                <a16:creationId xmlns:a16="http://schemas.microsoft.com/office/drawing/2014/main" id="{A48A471B-C51E-4EFE-8BE1-3B66059A8DA9}"/>
+                <a16:creationId xmlns:a16="http://schemas.microsoft.com/office/drawing/2014/main" id="{5B2464DF-4F1A-42CB-B5D0-81BD00A1AB25}"/>
               </a:ext>
             </a:extLst>
           </p:cNvPr>
@@ -11345,7 +11353,7 @@
           <p:cNvPr id="9" name="">
             <a:extLst xmlns:a="http://schemas.openxmlformats.org/drawingml/2006/main">
               <a:ext uri="{FF2B5EF4-FFF2-40B4-BE49-F238E27FC236}">
-                <a16:creationId xmlns:a16="http://schemas.microsoft.com/office/drawing/2014/main" id="{401CC530-28D5-4356-9B2A-9C03DD30DB63}"/>
+                <a16:creationId xmlns:a16="http://schemas.microsoft.com/office/drawing/2014/main" id="{1BB65505-CC44-4145-8B61-C4E38EE2E776}"/>
               </a:ext>
             </a:extLst>
           </p:cNvPr>
@@ -11406,7 +11414,7 @@
           <p:nvPr/>
         </p:nvPicPr>
         <p:blipFill>
-          <a:blip xmlns:r="http://schemas.openxmlformats.org/officeDocument/2006/relationships" xmlns:a="http://schemas.openxmlformats.org/drawingml/2006/main" r:embed="Reeeb06673947450d"/>
+          <a:blip xmlns:r="http://schemas.openxmlformats.org/officeDocument/2006/relationships" xmlns:a="http://schemas.openxmlformats.org/drawingml/2006/main" r:embed="R8ff0d4d3b9c34604"/>
           <a:stretch xmlns:a="http://schemas.openxmlformats.org/drawingml/2006/main"/>
         </p:blipFill>
         <p:spPr>
@@ -11424,7 +11432,7 @@
           <p:cNvPr id="11" name="">
             <a:extLst xmlns:a="http://schemas.openxmlformats.org/drawingml/2006/main">
               <a:ext uri="{FF2B5EF4-FFF2-40B4-BE49-F238E27FC236}">
-                <a16:creationId xmlns:a16="http://schemas.microsoft.com/office/drawing/2014/main" id="{BA7E34A0-1521-47E2-8773-A366B0172A98}"/>
+                <a16:creationId xmlns:a16="http://schemas.microsoft.com/office/drawing/2014/main" id="{FEFF43BD-5B37-4B65-BD6C-701CE4FCA36E}"/>
               </a:ext>
             </a:extLst>
           </p:cNvPr>
@@ -11481,7 +11489,7 @@
           <p:cNvPr id="12" name="">
             <a:extLst xmlns:a="http://schemas.openxmlformats.org/drawingml/2006/main">
               <a:ext uri="{FF2B5EF4-FFF2-40B4-BE49-F238E27FC236}">
-                <a16:creationId xmlns:a16="http://schemas.microsoft.com/office/drawing/2014/main" id="{F5816DBE-00AB-426A-847A-648993FA61EB}"/>
+                <a16:creationId xmlns:a16="http://schemas.microsoft.com/office/drawing/2014/main" id="{4273E221-0A00-4C2C-81FF-77B2B5351913}"/>
               </a:ext>
             </a:extLst>
           </p:cNvPr>
@@ -11538,7 +11546,7 @@
           <p:cNvPr id="13" name="">
             <a:extLst xmlns:a="http://schemas.openxmlformats.org/drawingml/2006/main">
               <a:ext uri="{FF2B5EF4-FFF2-40B4-BE49-F238E27FC236}">
-                <a16:creationId xmlns:a16="http://schemas.microsoft.com/office/drawing/2014/main" id="{E9A8A240-DD59-4C35-972C-AB5ED658EA59}"/>
+                <a16:creationId xmlns:a16="http://schemas.microsoft.com/office/drawing/2014/main" id="{D59975B5-2E11-4030-864A-A7C26F823BBB}"/>
               </a:ext>
             </a:extLst>
           </p:cNvPr>
@@ -11570,7 +11578,7 @@
           <p:cNvPr id="14" name="">
             <a:extLst xmlns:a="http://schemas.openxmlformats.org/drawingml/2006/main">
               <a:ext uri="{FF2B5EF4-FFF2-40B4-BE49-F238E27FC236}">
-                <a16:creationId xmlns:a16="http://schemas.microsoft.com/office/drawing/2014/main" id="{0BD922C9-FC42-4704-AEAD-C9FCBB713977}"/>
+                <a16:creationId xmlns:a16="http://schemas.microsoft.com/office/drawing/2014/main" id="{B24F8874-C104-4FED-A690-78A5C114C027}"/>
               </a:ext>
             </a:extLst>
           </p:cNvPr>
@@ -11627,7 +11635,7 @@
           <p:cNvPr id="15" name="">
             <a:extLst xmlns:a="http://schemas.openxmlformats.org/drawingml/2006/main">
               <a:ext uri="{FF2B5EF4-FFF2-40B4-BE49-F238E27FC236}">
-                <a16:creationId xmlns:a16="http://schemas.microsoft.com/office/drawing/2014/main" id="{CE919857-8E77-4498-80C6-B9B007172261}"/>
+                <a16:creationId xmlns:a16="http://schemas.microsoft.com/office/drawing/2014/main" id="{D02321F9-18BF-4A5E-B967-3CB769638A1C}"/>
               </a:ext>
             </a:extLst>
           </p:cNvPr>
@@ -11682,7 +11690,7 @@
     </p:spTree>
     <p:extLst>
       <p:ext uri="{BB962C8B-B14F-4D97-AF65-F5344CB8AC3E}">
-        <p14:creationId xmlns:p14="http://schemas.microsoft.com/office/powerpoint/2010/main" val="89222815"/>
+        <p14:creationId xmlns:p14="http://schemas.microsoft.com/office/powerpoint/2010/main" val="1274634967"/>
       </p:ext>
     </p:extLst>
   </p:cSld>
@@ -11837,7 +11845,7 @@
           <p:cNvPr id="23" name="">
             <a:extLst xmlns:a="http://schemas.openxmlformats.org/drawingml/2006/main">
               <a:ext uri="{FF2B5EF4-FFF2-40B4-BE49-F238E27FC236}">
-                <a16:creationId xmlns:a16="http://schemas.microsoft.com/office/drawing/2014/main" id="{925A4E4F-BB27-48DF-B037-5DCEFFD1101F}"/>
+                <a16:creationId xmlns:a16="http://schemas.microsoft.com/office/drawing/2014/main" id="{B1D85F77-D758-4440-97EE-3DBCD01A24D5}"/>
               </a:ext>
             </a:extLst>
           </p:cNvPr>
@@ -11869,7 +11877,7 @@
           <p:cNvPr id="2" name="">
             <a:extLst xmlns:a="http://schemas.openxmlformats.org/drawingml/2006/main">
               <a:ext uri="{FF2B5EF4-FFF2-40B4-BE49-F238E27FC236}">
-                <a16:creationId xmlns:a16="http://schemas.microsoft.com/office/drawing/2014/main" id="{EE4F2833-1C35-487B-889C-ECA00DF0F294}"/>
+                <a16:creationId xmlns:a16="http://schemas.microsoft.com/office/drawing/2014/main" id="{A04FCD15-528F-418B-BF8E-6D519347CB10}"/>
               </a:ext>
             </a:extLst>
           </p:cNvPr>
@@ -11926,7 +11934,7 @@
           <p:cNvPr id="3" name="">
             <a:extLst xmlns:a="http://schemas.openxmlformats.org/drawingml/2006/main">
               <a:ext uri="{FF2B5EF4-FFF2-40B4-BE49-F238E27FC236}">
-                <a16:creationId xmlns:a16="http://schemas.microsoft.com/office/drawing/2014/main" id="{6DAE3341-CDAB-454D-AE8A-F161AFD237A1}"/>
+                <a16:creationId xmlns:a16="http://schemas.microsoft.com/office/drawing/2014/main" id="{B68DA3C3-4B26-4DBA-81EC-3DEAB48901E8}"/>
               </a:ext>
             </a:extLst>
           </p:cNvPr>
@@ -11958,7 +11966,7 @@
           <p:cNvPr id="4" name="">
             <a:extLst xmlns:a="http://schemas.openxmlformats.org/drawingml/2006/main">
               <a:ext uri="{FF2B5EF4-FFF2-40B4-BE49-F238E27FC236}">
-                <a16:creationId xmlns:a16="http://schemas.microsoft.com/office/drawing/2014/main" id="{D403A3BC-F190-46B9-A613-E6A9FC0FCE7C}"/>
+                <a16:creationId xmlns:a16="http://schemas.microsoft.com/office/drawing/2014/main" id="{3B1FF861-94EF-4E4E-9B8C-792F6DE553B7}"/>
               </a:ext>
             </a:extLst>
           </p:cNvPr>
@@ -12015,7 +12023,7 @@
           <p:cNvPr id="5" name="">
             <a:extLst xmlns:a="http://schemas.openxmlformats.org/drawingml/2006/main">
               <a:ext uri="{FF2B5EF4-FFF2-40B4-BE49-F238E27FC236}">
-                <a16:creationId xmlns:a16="http://schemas.microsoft.com/office/drawing/2014/main" id="{FB59AB0C-33EC-4EA0-A9BC-800D1B3E148E}"/>
+                <a16:creationId xmlns:a16="http://schemas.microsoft.com/office/drawing/2014/main" id="{7C9B5BBD-34E9-491D-AE66-D3A3D22660E2}"/>
               </a:ext>
             </a:extLst>
           </p:cNvPr>
@@ -12072,7 +12080,7 @@
           <p:cNvPr id="6" name="">
             <a:extLst xmlns:a="http://schemas.openxmlformats.org/drawingml/2006/main">
               <a:ext uri="{FF2B5EF4-FFF2-40B4-BE49-F238E27FC236}">
-                <a16:creationId xmlns:a16="http://schemas.microsoft.com/office/drawing/2014/main" id="{F4C40C92-6E22-48F8-956C-5804D667116B}"/>
+                <a16:creationId xmlns:a16="http://schemas.microsoft.com/office/drawing/2014/main" id="{12C55D35-4B61-4941-A15C-5B8BA3C97BC9}"/>
               </a:ext>
             </a:extLst>
           </p:cNvPr>
@@ -12129,7 +12137,7 @@
           <p:cNvPr id="7" name="">
             <a:extLst xmlns:a="http://schemas.openxmlformats.org/drawingml/2006/main">
               <a:ext uri="{FF2B5EF4-FFF2-40B4-BE49-F238E27FC236}">
-                <a16:creationId xmlns:a16="http://schemas.microsoft.com/office/drawing/2014/main" id="{876B26B4-5DDC-4837-BF8A-C413DF45D70E}"/>
+                <a16:creationId xmlns:a16="http://schemas.microsoft.com/office/drawing/2014/main" id="{19183CD9-94E2-422A-BC46-E054F03FF9D3}"/>
               </a:ext>
             </a:extLst>
           </p:cNvPr>
@@ -12161,7 +12169,7 @@
           <p:cNvPr id="8" name="">
             <a:extLst xmlns:a="http://schemas.openxmlformats.org/drawingml/2006/main">
               <a:ext uri="{FF2B5EF4-FFF2-40B4-BE49-F238E27FC236}">
-                <a16:creationId xmlns:a16="http://schemas.microsoft.com/office/drawing/2014/main" id="{7D78C68B-4D09-4AA4-9A9E-41932A6B1DD6}"/>
+                <a16:creationId xmlns:a16="http://schemas.microsoft.com/office/drawing/2014/main" id="{06715404-AAF8-4A98-AFA8-E67697744658}"/>
               </a:ext>
             </a:extLst>
           </p:cNvPr>
@@ -12218,7 +12226,7 @@
           <p:cNvPr id="9" name="">
             <a:extLst xmlns:a="http://schemas.openxmlformats.org/drawingml/2006/main">
               <a:ext uri="{FF2B5EF4-FFF2-40B4-BE49-F238E27FC236}">
-                <a16:creationId xmlns:a16="http://schemas.microsoft.com/office/drawing/2014/main" id="{94AB9D95-A70A-46EA-AE5F-9D881B3A074D}"/>
+                <a16:creationId xmlns:a16="http://schemas.microsoft.com/office/drawing/2014/main" id="{BAD35C20-1F99-4762-AC2B-FB751433A495}"/>
               </a:ext>
             </a:extLst>
           </p:cNvPr>
@@ -12275,7 +12283,7 @@
           <p:cNvPr id="10" name="">
             <a:extLst xmlns:a="http://schemas.openxmlformats.org/drawingml/2006/main">
               <a:ext uri="{FF2B5EF4-FFF2-40B4-BE49-F238E27FC236}">
-                <a16:creationId xmlns:a16="http://schemas.microsoft.com/office/drawing/2014/main" id="{3337B5FC-DFD3-423C-99A2-69F0C1B3E00D}"/>
+                <a16:creationId xmlns:a16="http://schemas.microsoft.com/office/drawing/2014/main" id="{B2E6B424-4594-49D7-B035-C03BF95DB1B8}"/>
               </a:ext>
             </a:extLst>
           </p:cNvPr>
@@ -12309,7 +12317,7 @@
           <p:cNvPr id="11" name="">
             <a:extLst xmlns:a="http://schemas.openxmlformats.org/drawingml/2006/main">
               <a:ext uri="{FF2B5EF4-FFF2-40B4-BE49-F238E27FC236}">
-                <a16:creationId xmlns:a16="http://schemas.microsoft.com/office/drawing/2014/main" id="{3E46F888-7CC9-4D90-9E97-548F37640702}"/>
+                <a16:creationId xmlns:a16="http://schemas.microsoft.com/office/drawing/2014/main" id="{EF88041C-0EC0-4992-B3DC-A21984BD33C2}"/>
               </a:ext>
             </a:extLst>
           </p:cNvPr>
@@ -12341,7 +12349,7 @@
           <p:cNvPr id="12" name="">
             <a:extLst xmlns:a="http://schemas.openxmlformats.org/drawingml/2006/main">
               <a:ext uri="{FF2B5EF4-FFF2-40B4-BE49-F238E27FC236}">
-                <a16:creationId xmlns:a16="http://schemas.microsoft.com/office/drawing/2014/main" id="{97AA1C6E-99CB-461F-9125-10C571636CDC}"/>
+                <a16:creationId xmlns:a16="http://schemas.microsoft.com/office/drawing/2014/main" id="{1E3332D9-FDA0-429E-A266-187E572641FF}"/>
               </a:ext>
             </a:extLst>
           </p:cNvPr>
@@ -12398,7 +12406,7 @@
           <p:cNvPr id="13" name="">
             <a:extLst xmlns:a="http://schemas.openxmlformats.org/drawingml/2006/main">
               <a:ext uri="{FF2B5EF4-FFF2-40B4-BE49-F238E27FC236}">
-                <a16:creationId xmlns:a16="http://schemas.microsoft.com/office/drawing/2014/main" id="{16F6BFB5-6BFD-420D-80E7-3FE6E0871518}"/>
+                <a16:creationId xmlns:a16="http://schemas.microsoft.com/office/drawing/2014/main" id="{E3BBD7CF-5594-4001-BAD6-BE19054A5982}"/>
               </a:ext>
             </a:extLst>
           </p:cNvPr>
@@ -12455,7 +12463,7 @@
           <p:cNvPr id="14" name="">
             <a:extLst xmlns:a="http://schemas.openxmlformats.org/drawingml/2006/main">
               <a:ext uri="{FF2B5EF4-FFF2-40B4-BE49-F238E27FC236}">
-                <a16:creationId xmlns:a16="http://schemas.microsoft.com/office/drawing/2014/main" id="{35740554-6D23-48C5-8A35-E1546D656597}"/>
+                <a16:creationId xmlns:a16="http://schemas.microsoft.com/office/drawing/2014/main" id="{3BC50F69-60E2-4250-94BC-EBE9E91951D7}"/>
               </a:ext>
             </a:extLst>
           </p:cNvPr>
@@ -12489,7 +12497,7 @@
           <p:cNvPr id="15" name="">
             <a:extLst xmlns:a="http://schemas.openxmlformats.org/drawingml/2006/main">
               <a:ext uri="{FF2B5EF4-FFF2-40B4-BE49-F238E27FC236}">
-                <a16:creationId xmlns:a16="http://schemas.microsoft.com/office/drawing/2014/main" id="{6E5BCAC5-FCEB-42F8-811D-48292F3F9004}"/>
+                <a16:creationId xmlns:a16="http://schemas.microsoft.com/office/drawing/2014/main" id="{EF84BE66-E8DB-4264-8A03-ED91DCF6776E}"/>
               </a:ext>
             </a:extLst>
           </p:cNvPr>
@@ -12521,7 +12529,7 @@
           <p:cNvPr id="16" name="">
             <a:extLst xmlns:a="http://schemas.openxmlformats.org/drawingml/2006/main">
               <a:ext uri="{FF2B5EF4-FFF2-40B4-BE49-F238E27FC236}">
-                <a16:creationId xmlns:a16="http://schemas.microsoft.com/office/drawing/2014/main" id="{5923E94E-880D-495D-9A91-8AA7A52777A3}"/>
+                <a16:creationId xmlns:a16="http://schemas.microsoft.com/office/drawing/2014/main" id="{A72B4021-D9F5-4820-939B-344188DAC315}"/>
               </a:ext>
             </a:extLst>
           </p:cNvPr>
@@ -12578,7 +12586,7 @@
           <p:cNvPr id="17" name="">
             <a:extLst xmlns:a="http://schemas.openxmlformats.org/drawingml/2006/main">
               <a:ext uri="{FF2B5EF4-FFF2-40B4-BE49-F238E27FC236}">
-                <a16:creationId xmlns:a16="http://schemas.microsoft.com/office/drawing/2014/main" id="{8828B1D9-DE54-45D4-9002-F53BD6283DB7}"/>
+                <a16:creationId xmlns:a16="http://schemas.microsoft.com/office/drawing/2014/main" id="{B949A7F5-A820-471C-BA14-0CCA1F5742FF}"/>
               </a:ext>
             </a:extLst>
           </p:cNvPr>
@@ -12635,7 +12643,7 @@
           <p:cNvPr id="18" name="">
             <a:extLst xmlns:a="http://schemas.openxmlformats.org/drawingml/2006/main">
               <a:ext uri="{FF2B5EF4-FFF2-40B4-BE49-F238E27FC236}">
-                <a16:creationId xmlns:a16="http://schemas.microsoft.com/office/drawing/2014/main" id="{4012DE62-C594-49A0-81E4-8D67FE51B74F}"/>
+                <a16:creationId xmlns:a16="http://schemas.microsoft.com/office/drawing/2014/main" id="{F523CB4E-8973-40AD-AB05-6BE5D31A10CE}"/>
               </a:ext>
             </a:extLst>
           </p:cNvPr>
@@ -12669,7 +12677,7 @@
           <p:cNvPr id="19" name="">
             <a:extLst xmlns:a="http://schemas.openxmlformats.org/drawingml/2006/main">
               <a:ext uri="{FF2B5EF4-FFF2-40B4-BE49-F238E27FC236}">
-                <a16:creationId xmlns:a16="http://schemas.microsoft.com/office/drawing/2014/main" id="{739E9E03-BD33-40FA-8131-8174FBDCE867}"/>
+                <a16:creationId xmlns:a16="http://schemas.microsoft.com/office/drawing/2014/main" id="{B521D0A0-DD18-4994-915C-CFB2B9A579F0}"/>
               </a:ext>
             </a:extLst>
           </p:cNvPr>
@@ -12701,7 +12709,7 @@
           <p:cNvPr id="20" name="">
             <a:extLst xmlns:a="http://schemas.openxmlformats.org/drawingml/2006/main">
               <a:ext uri="{FF2B5EF4-FFF2-40B4-BE49-F238E27FC236}">
-                <a16:creationId xmlns:a16="http://schemas.microsoft.com/office/drawing/2014/main" id="{50349351-6EA4-4C05-AB79-800C22C25DED}"/>
+                <a16:creationId xmlns:a16="http://schemas.microsoft.com/office/drawing/2014/main" id="{0560C093-3552-4BA1-950D-79ECBB710F02}"/>
               </a:ext>
             </a:extLst>
           </p:cNvPr>
@@ -12758,7 +12766,7 @@
           <p:cNvPr id="21" name="">
             <a:extLst xmlns:a="http://schemas.openxmlformats.org/drawingml/2006/main">
               <a:ext uri="{FF2B5EF4-FFF2-40B4-BE49-F238E27FC236}">
-                <a16:creationId xmlns:a16="http://schemas.microsoft.com/office/drawing/2014/main" id="{8E92D12D-C2AA-4F52-BC72-F2FCDE83BEA8}"/>
+                <a16:creationId xmlns:a16="http://schemas.microsoft.com/office/drawing/2014/main" id="{6862E8AE-FBF6-4FD7-9BA0-D06699EF57A7}"/>
               </a:ext>
             </a:extLst>
           </p:cNvPr>
@@ -12815,7 +12823,7 @@
           <p:cNvPr id="22" name="">
             <a:extLst xmlns:a="http://schemas.openxmlformats.org/drawingml/2006/main">
               <a:ext uri="{FF2B5EF4-FFF2-40B4-BE49-F238E27FC236}">
-                <a16:creationId xmlns:a16="http://schemas.microsoft.com/office/drawing/2014/main" id="{0AA82487-0351-4F1C-9047-84B218271E61}"/>
+                <a16:creationId xmlns:a16="http://schemas.microsoft.com/office/drawing/2014/main" id="{B66695A2-3BA5-44EB-AA37-85208FFB0257}"/>
               </a:ext>
             </a:extLst>
           </p:cNvPr>
@@ -12870,7 +12878,7 @@
     </p:spTree>
     <p:extLst>
       <p:ext uri="{BB962C8B-B14F-4D97-AF65-F5344CB8AC3E}">
-        <p14:creationId xmlns:p14="http://schemas.microsoft.com/office/powerpoint/2010/main" val="669534078"/>
+        <p14:creationId xmlns:p14="http://schemas.microsoft.com/office/powerpoint/2010/main" val="2113489133"/>
       </p:ext>
     </p:extLst>
   </p:cSld>
@@ -13071,7 +13079,7 @@
           <p:cNvPr id="22" name="">
             <a:extLst xmlns:a="http://schemas.openxmlformats.org/drawingml/2006/main">
               <a:ext uri="{FF2B5EF4-FFF2-40B4-BE49-F238E27FC236}">
-                <a16:creationId xmlns:a16="http://schemas.microsoft.com/office/drawing/2014/main" id="{8D1951A1-967C-4987-BCBC-96DF261E8710}"/>
+                <a16:creationId xmlns:a16="http://schemas.microsoft.com/office/drawing/2014/main" id="{0ED833E5-CB71-46E2-8D9F-F3F7299D97C8}"/>
               </a:ext>
             </a:extLst>
           </p:cNvPr>
@@ -13103,7 +13111,7 @@
           <p:cNvPr id="2" name="">
             <a:extLst xmlns:a="http://schemas.openxmlformats.org/drawingml/2006/main">
               <a:ext uri="{FF2B5EF4-FFF2-40B4-BE49-F238E27FC236}">
-                <a16:creationId xmlns:a16="http://schemas.microsoft.com/office/drawing/2014/main" id="{4DCEC250-BABF-4E68-85A0-DAEA11F051D6}"/>
+                <a16:creationId xmlns:a16="http://schemas.microsoft.com/office/drawing/2014/main" id="{739546FC-E8A0-4C34-914A-9E819D5084DA}"/>
               </a:ext>
             </a:extLst>
           </p:cNvPr>
@@ -13160,7 +13168,7 @@
           <p:cNvPr id="3" name="">
             <a:extLst xmlns:a="http://schemas.openxmlformats.org/drawingml/2006/main">
               <a:ext uri="{FF2B5EF4-FFF2-40B4-BE49-F238E27FC236}">
-                <a16:creationId xmlns:a16="http://schemas.microsoft.com/office/drawing/2014/main" id="{8E9155A1-7963-4C4B-9A40-0ACF8EE06900}"/>
+                <a16:creationId xmlns:a16="http://schemas.microsoft.com/office/drawing/2014/main" id="{ECAFB31F-1AE3-4E82-B066-4083EEC541D6}"/>
               </a:ext>
             </a:extLst>
           </p:cNvPr>
@@ -13192,7 +13200,7 @@
           <p:cNvPr id="4" name="">
             <a:extLst xmlns:a="http://schemas.openxmlformats.org/drawingml/2006/main">
               <a:ext uri="{FF2B5EF4-FFF2-40B4-BE49-F238E27FC236}">
-                <a16:creationId xmlns:a16="http://schemas.microsoft.com/office/drawing/2014/main" id="{907A023F-60B5-43E0-99F0-C6F5EAB50174}"/>
+                <a16:creationId xmlns:a16="http://schemas.microsoft.com/office/drawing/2014/main" id="{E04A7879-96B2-4161-BA87-66CF253FDFE4}"/>
               </a:ext>
             </a:extLst>
           </p:cNvPr>
@@ -13249,7 +13257,7 @@
           <p:cNvPr id="5" name="">
             <a:extLst xmlns:a="http://schemas.openxmlformats.org/drawingml/2006/main">
               <a:ext uri="{FF2B5EF4-FFF2-40B4-BE49-F238E27FC236}">
-                <a16:creationId xmlns:a16="http://schemas.microsoft.com/office/drawing/2014/main" id="{CD377C51-B10E-4A3E-83B1-D1492A929FA6}"/>
+                <a16:creationId xmlns:a16="http://schemas.microsoft.com/office/drawing/2014/main" id="{06B8526B-50A5-470A-9B13-D45F1E7DE77A}"/>
               </a:ext>
             </a:extLst>
           </p:cNvPr>
@@ -13306,7 +13314,7 @@
           <p:cNvPr id="6" name="">
             <a:extLst xmlns:a="http://schemas.openxmlformats.org/drawingml/2006/main">
               <a:ext uri="{FF2B5EF4-FFF2-40B4-BE49-F238E27FC236}">
-                <a16:creationId xmlns:a16="http://schemas.microsoft.com/office/drawing/2014/main" id="{ED3A6DD8-2143-4EC3-A3BE-D82285AF3AEE}"/>
+                <a16:creationId xmlns:a16="http://schemas.microsoft.com/office/drawing/2014/main" id="{17BE5290-1A87-488A-9ECA-098AA1D22ECB}"/>
               </a:ext>
             </a:extLst>
           </p:cNvPr>
@@ -13363,7 +13371,7 @@
           <p:cNvPr id="7" name="">
             <a:extLst xmlns:a="http://schemas.openxmlformats.org/drawingml/2006/main">
               <a:ext uri="{FF2B5EF4-FFF2-40B4-BE49-F238E27FC236}">
-                <a16:creationId xmlns:a16="http://schemas.microsoft.com/office/drawing/2014/main" id="{96AD3D63-717E-4EE9-B840-EF7C86940973}"/>
+                <a16:creationId xmlns:a16="http://schemas.microsoft.com/office/drawing/2014/main" id="{BC29AF1C-87B7-442A-B37A-420A6AC9D6CE}"/>
               </a:ext>
             </a:extLst>
           </p:cNvPr>
@@ -13395,7 +13403,7 @@
           <p:cNvPr id="8" name="">
             <a:extLst xmlns:a="http://schemas.openxmlformats.org/drawingml/2006/main">
               <a:ext uri="{FF2B5EF4-FFF2-40B4-BE49-F238E27FC236}">
-                <a16:creationId xmlns:a16="http://schemas.microsoft.com/office/drawing/2014/main" id="{44FFC9E5-F478-43F4-89FC-EBD2AB7502AF}"/>
+                <a16:creationId xmlns:a16="http://schemas.microsoft.com/office/drawing/2014/main" id="{B49373B8-7632-4D46-B00E-732F36CCF818}"/>
               </a:ext>
             </a:extLst>
           </p:cNvPr>
@@ -13452,7 +13460,7 @@
           <p:cNvPr id="9" name="">
             <a:extLst xmlns:a="http://schemas.openxmlformats.org/drawingml/2006/main">
               <a:ext uri="{FF2B5EF4-FFF2-40B4-BE49-F238E27FC236}">
-                <a16:creationId xmlns:a16="http://schemas.microsoft.com/office/drawing/2014/main" id="{BF161B44-1468-4503-B0AE-1185A829F370}"/>
+                <a16:creationId xmlns:a16="http://schemas.microsoft.com/office/drawing/2014/main" id="{B85E6B04-3A0D-4D5B-ADFA-4BC85A58FCB9}"/>
               </a:ext>
             </a:extLst>
           </p:cNvPr>
@@ -13509,7 +13517,7 @@
           <p:cNvPr id="10" name="">
             <a:extLst xmlns:a="http://schemas.openxmlformats.org/drawingml/2006/main">
               <a:ext uri="{FF2B5EF4-FFF2-40B4-BE49-F238E27FC236}">
-                <a16:creationId xmlns:a16="http://schemas.microsoft.com/office/drawing/2014/main" id="{6B11919A-CCF8-4C18-89CD-DA85F01D9C4C}"/>
+                <a16:creationId xmlns:a16="http://schemas.microsoft.com/office/drawing/2014/main" id="{8DBB4A31-7DC7-4A06-8588-91B81007FA11}"/>
               </a:ext>
             </a:extLst>
           </p:cNvPr>
@@ -13543,7 +13551,7 @@
           <p:cNvPr id="11" name="">
             <a:extLst xmlns:a="http://schemas.openxmlformats.org/drawingml/2006/main">
               <a:ext uri="{FF2B5EF4-FFF2-40B4-BE49-F238E27FC236}">
-                <a16:creationId xmlns:a16="http://schemas.microsoft.com/office/drawing/2014/main" id="{6DD19B56-CDE4-4C63-9746-E273E48D39F7}"/>
+                <a16:creationId xmlns:a16="http://schemas.microsoft.com/office/drawing/2014/main" id="{F4CA2144-03C4-4528-8E8D-094EAE7120EA}"/>
               </a:ext>
             </a:extLst>
           </p:cNvPr>
@@ -13575,7 +13583,7 @@
           <p:cNvPr id="12" name="">
             <a:extLst xmlns:a="http://schemas.openxmlformats.org/drawingml/2006/main">
               <a:ext uri="{FF2B5EF4-FFF2-40B4-BE49-F238E27FC236}">
-                <a16:creationId xmlns:a16="http://schemas.microsoft.com/office/drawing/2014/main" id="{2D078286-C79F-425C-A508-A73541913C3D}"/>
+                <a16:creationId xmlns:a16="http://schemas.microsoft.com/office/drawing/2014/main" id="{C765FD01-92CB-4EBD-AE32-575C5FD64B31}"/>
               </a:ext>
             </a:extLst>
           </p:cNvPr>
@@ -13632,7 +13640,7 @@
           <p:cNvPr id="13" name="">
             <a:extLst xmlns:a="http://schemas.openxmlformats.org/drawingml/2006/main">
               <a:ext uri="{FF2B5EF4-FFF2-40B4-BE49-F238E27FC236}">
-                <a16:creationId xmlns:a16="http://schemas.microsoft.com/office/drawing/2014/main" id="{A5778D75-4513-4533-8BA4-5ED93591707E}"/>
+                <a16:creationId xmlns:a16="http://schemas.microsoft.com/office/drawing/2014/main" id="{90C2E6AE-986B-4B99-8FE9-9BFC4ECBB369}"/>
               </a:ext>
             </a:extLst>
           </p:cNvPr>
@@ -13689,7 +13697,7 @@
           <p:cNvPr id="14" name="">
             <a:extLst xmlns:a="http://schemas.openxmlformats.org/drawingml/2006/main">
               <a:ext uri="{FF2B5EF4-FFF2-40B4-BE49-F238E27FC236}">
-                <a16:creationId xmlns:a16="http://schemas.microsoft.com/office/drawing/2014/main" id="{5ADD957C-F273-4498-AFEB-AAC3212C2C37}"/>
+                <a16:creationId xmlns:a16="http://schemas.microsoft.com/office/drawing/2014/main" id="{934AA6FF-5D53-4230-8CB4-E0CF16FEFD6B}"/>
               </a:ext>
             </a:extLst>
           </p:cNvPr>
@@ -13723,7 +13731,7 @@
           <p:cNvPr id="15" name="">
             <a:extLst xmlns:a="http://schemas.openxmlformats.org/drawingml/2006/main">
               <a:ext uri="{FF2B5EF4-FFF2-40B4-BE49-F238E27FC236}">
-                <a16:creationId xmlns:a16="http://schemas.microsoft.com/office/drawing/2014/main" id="{B8F55FBB-22BF-4D43-858F-8242FAD85C41}"/>
+                <a16:creationId xmlns:a16="http://schemas.microsoft.com/office/drawing/2014/main" id="{17F36EC2-B2B5-4970-B1BF-3459BA7D5281}"/>
               </a:ext>
             </a:extLst>
           </p:cNvPr>
@@ -13755,7 +13763,7 @@
           <p:cNvPr id="16" name="">
             <a:extLst xmlns:a="http://schemas.openxmlformats.org/drawingml/2006/main">
               <a:ext uri="{FF2B5EF4-FFF2-40B4-BE49-F238E27FC236}">
-                <a16:creationId xmlns:a16="http://schemas.microsoft.com/office/drawing/2014/main" id="{3B966A8B-89FA-4B1B-9111-15336CE42F3D}"/>
+                <a16:creationId xmlns:a16="http://schemas.microsoft.com/office/drawing/2014/main" id="{3421C83E-32B7-4EB3-B947-CF33E0976CF4}"/>
               </a:ext>
             </a:extLst>
           </p:cNvPr>
@@ -13812,7 +13820,7 @@
           <p:cNvPr id="17" name="">
             <a:extLst xmlns:a="http://schemas.openxmlformats.org/drawingml/2006/main">
               <a:ext uri="{FF2B5EF4-FFF2-40B4-BE49-F238E27FC236}">
-                <a16:creationId xmlns:a16="http://schemas.microsoft.com/office/drawing/2014/main" id="{D6B5F1B6-EE2C-46F2-A1FB-1CB5859507A2}"/>
+                <a16:creationId xmlns:a16="http://schemas.microsoft.com/office/drawing/2014/main" id="{818583C7-08BC-477C-8FD6-AB7DE0C7868F}"/>
               </a:ext>
             </a:extLst>
           </p:cNvPr>
@@ -13869,7 +13877,7 @@
           <p:cNvPr id="18" name="">
             <a:extLst xmlns:a="http://schemas.openxmlformats.org/drawingml/2006/main">
               <a:ext uri="{FF2B5EF4-FFF2-40B4-BE49-F238E27FC236}">
-                <a16:creationId xmlns:a16="http://schemas.microsoft.com/office/drawing/2014/main" id="{5DDA1C54-1B57-4F12-9FE4-EE3322E36E0B}"/>
+                <a16:creationId xmlns:a16="http://schemas.microsoft.com/office/drawing/2014/main" id="{C24F6AE0-F41D-494F-BBD5-2CACBF9EFB2A}"/>
               </a:ext>
             </a:extLst>
           </p:cNvPr>
@@ -13903,7 +13911,7 @@
           <p:cNvPr id="19" name="">
             <a:extLst xmlns:a="http://schemas.openxmlformats.org/drawingml/2006/main">
               <a:ext uri="{FF2B5EF4-FFF2-40B4-BE49-F238E27FC236}">
-                <a16:creationId xmlns:a16="http://schemas.microsoft.com/office/drawing/2014/main" id="{DB2D447D-D13F-4282-95AF-CAB99B8223C2}"/>
+                <a16:creationId xmlns:a16="http://schemas.microsoft.com/office/drawing/2014/main" id="{23639E4E-5CBF-4775-B2E1-FB6705009168}"/>
               </a:ext>
             </a:extLst>
           </p:cNvPr>
@@ -13935,7 +13943,7 @@
           <p:cNvPr id="20" name="">
             <a:extLst xmlns:a="http://schemas.openxmlformats.org/drawingml/2006/main">
               <a:ext uri="{FF2B5EF4-FFF2-40B4-BE49-F238E27FC236}">
-                <a16:creationId xmlns:a16="http://schemas.microsoft.com/office/drawing/2014/main" id="{662B0B4E-3EFB-44A4-AD53-C06CE2837873}"/>
+                <a16:creationId xmlns:a16="http://schemas.microsoft.com/office/drawing/2014/main" id="{5A8431B9-42C6-4C1C-A627-A58D51DD363E}"/>
               </a:ext>
             </a:extLst>
           </p:cNvPr>
@@ -13992,7 +14000,7 @@
           <p:cNvPr id="21" name="">
             <a:extLst xmlns:a="http://schemas.openxmlformats.org/drawingml/2006/main">
               <a:ext uri="{FF2B5EF4-FFF2-40B4-BE49-F238E27FC236}">
-                <a16:creationId xmlns:a16="http://schemas.microsoft.com/office/drawing/2014/main" id="{0E393828-418F-4574-B932-6DCABCB8D6E5}"/>
+                <a16:creationId xmlns:a16="http://schemas.microsoft.com/office/drawing/2014/main" id="{EED3D519-C168-4918-B121-1F847F49997F}"/>
               </a:ext>
             </a:extLst>
           </p:cNvPr>
@@ -14047,7 +14055,7 @@
     </p:spTree>
     <p:extLst>
       <p:ext uri="{BB962C8B-B14F-4D97-AF65-F5344CB8AC3E}">
-        <p14:creationId xmlns:p14="http://schemas.microsoft.com/office/powerpoint/2010/main" val="460049011"/>
+        <p14:creationId xmlns:p14="http://schemas.microsoft.com/office/powerpoint/2010/main" val="1236312574"/>
       </p:ext>
     </p:extLst>
   </p:cSld>
